--- a/pptx_generator/training_deck.pptx
+++ b/pptx_generator/training_deck.pptx
@@ -5728,8 +5728,8 @@
         </p:nvSpPr>
         <p:spPr>
           <a:xfrm>
-            <a:off x="324000" y="522000"/>
-            <a:ext cx="4031999" cy="576000"/>
+            <a:off x="324000" y="486000"/>
+            <a:ext cx="4104000" cy="288000"/>
           </a:xfrm>
           <a:prstGeom prst="rect">
             <a:avLst/>
@@ -5743,7 +5743,7 @@
           <a:lstStyle/>
           <a:p>
             <a:pPr>
-              <a:defRPr sz="3400" b="1">
+              <a:defRPr sz="1800" b="1">
                 <a:solidFill>
                   <a:srgbClr val="F2F2F2"/>
                 </a:solidFill>
@@ -5764,8 +5764,8 @@
         </p:nvSpPr>
         <p:spPr>
           <a:xfrm>
-            <a:off x="360000" y="1206000"/>
-            <a:ext cx="3420000" cy="558000"/>
+            <a:off x="360000" y="917999"/>
+            <a:ext cx="3744000" cy="882000"/>
           </a:xfrm>
           <a:prstGeom prst="rect">
             <a:avLst/>
@@ -5780,9 +5780,9 @@
           <a:p>
             <a:pPr>
               <a:spcAft>
-                <a:spcPts val="700"/>
+                <a:spcPts val="300"/>
               </a:spcAft>
-              <a:defRPr sz="1800">
+              <a:defRPr sz="1100">
                 <a:solidFill>
                   <a:srgbClr val="F2F2F2"/>
                 </a:solidFill>
@@ -5796,9 +5796,9 @@
           <a:p>
             <a:pPr>
               <a:spcAft>
-                <a:spcPts val="700"/>
+                <a:spcPts val="300"/>
               </a:spcAft>
-              <a:defRPr sz="1800">
+              <a:defRPr sz="1100">
                 <a:solidFill>
                   <a:srgbClr val="F2F2F2"/>
                 </a:solidFill>
@@ -5819,8 +5819,8 @@
         </p:nvSpPr>
         <p:spPr>
           <a:xfrm>
-            <a:off x="324000" y="1998000"/>
-            <a:ext cx="1152000" cy="57600"/>
+            <a:off x="324000" y="1925999"/>
+            <a:ext cx="936000" cy="28800"/>
           </a:xfrm>
           <a:prstGeom prst="rect">
             <a:avLst/>
@@ -5864,7 +5864,7 @@
         </p:nvSpPr>
         <p:spPr>
           <a:xfrm>
-            <a:off x="0" y="2466000"/>
+            <a:off x="0" y="2538000"/>
             <a:ext cx="4799880" cy="18000"/>
           </a:xfrm>
           <a:prstGeom prst="rect">
@@ -5917,8 +5917,8 @@
         </p:blipFill>
         <p:spPr>
           <a:xfrm>
-            <a:off x="198000" y="2527200"/>
-            <a:ext cx="100543" cy="100800"/>
+            <a:off x="198000" y="2577600"/>
+            <a:ext cx="64635" cy="64800"/>
           </a:xfrm>
           <a:prstGeom prst="rect">
             <a:avLst/>
@@ -5933,8 +5933,8 @@
         </p:nvSpPr>
         <p:spPr>
           <a:xfrm>
-            <a:off x="3791880" y="2512800"/>
-            <a:ext cx="810000" cy="108000"/>
+            <a:off x="3791880" y="2566800"/>
+            <a:ext cx="810000" cy="79200"/>
           </a:xfrm>
           <a:prstGeom prst="rect">
             <a:avLst/>
@@ -5948,7 +5948,7 @@
           <a:lstStyle/>
           <a:p>
             <a:pPr algn="r">
-              <a:defRPr sz="800" b="0">
+              <a:defRPr sz="600" b="0">
                 <a:solidFill>
                   <a:srgbClr val="F2F2F2"/>
                 </a:solidFill>
@@ -5995,8 +5995,8 @@
         </p:nvSpPr>
         <p:spPr>
           <a:xfrm>
-            <a:off x="306000" y="198000"/>
-            <a:ext cx="4068000" cy="306000"/>
+            <a:off x="306000" y="151200"/>
+            <a:ext cx="4140000" cy="187200"/>
           </a:xfrm>
           <a:prstGeom prst="rect">
             <a:avLst/>
@@ -6010,7 +6010,7 @@
           <a:lstStyle/>
           <a:p>
             <a:pPr>
-              <a:defRPr sz="3300" b="1">
+              <a:defRPr sz="1800" b="1">
                 <a:solidFill>
                   <a:srgbClr val="0D006A"/>
                 </a:solidFill>
@@ -6031,8 +6031,8 @@
         </p:nvSpPr>
         <p:spPr>
           <a:xfrm>
-            <a:off x="306000" y="514800"/>
-            <a:ext cx="450000" cy="28800"/>
+            <a:off x="306000" y="367200"/>
+            <a:ext cx="378000" cy="18000"/>
           </a:xfrm>
           <a:prstGeom prst="rect">
             <a:avLst/>
@@ -6076,8 +6076,8 @@
         </p:nvSpPr>
         <p:spPr>
           <a:xfrm>
-            <a:off x="378000" y="666000"/>
-            <a:ext cx="3924000" cy="1530000"/>
+            <a:off x="378000" y="486000"/>
+            <a:ext cx="3996000" cy="1745999"/>
           </a:xfrm>
           <a:prstGeom prst="rect">
             <a:avLst/>
@@ -6092,9 +6092,9 @@
           <a:p>
             <a:pPr>
               <a:spcAft>
-                <a:spcPts val="700"/>
+                <a:spcPts val="300"/>
               </a:spcAft>
-              <a:defRPr sz="1700">
+              <a:defRPr sz="1100">
                 <a:solidFill>
                   <a:srgbClr val="0D006A"/>
                 </a:solidFill>
@@ -6108,9 +6108,9 @@
           <a:p>
             <a:pPr>
               <a:spcAft>
-                <a:spcPts val="700"/>
+                <a:spcPts val="300"/>
               </a:spcAft>
-              <a:defRPr sz="1700">
+              <a:defRPr sz="1100">
                 <a:solidFill>
                   <a:srgbClr val="0D006A"/>
                 </a:solidFill>
@@ -6124,9 +6124,9 @@
           <a:p>
             <a:pPr>
               <a:spcAft>
-                <a:spcPts val="700"/>
+                <a:spcPts val="300"/>
               </a:spcAft>
-              <a:defRPr sz="1700">
+              <a:defRPr sz="1100">
                 <a:solidFill>
                   <a:srgbClr val="0D006A"/>
                 </a:solidFill>
@@ -6140,9 +6140,9 @@
           <a:p>
             <a:pPr>
               <a:spcAft>
-                <a:spcPts val="700"/>
+                <a:spcPts val="300"/>
               </a:spcAft>
-              <a:defRPr sz="1700">
+              <a:defRPr sz="1100">
                 <a:solidFill>
                   <a:srgbClr val="0D006A"/>
                 </a:solidFill>
@@ -6156,9 +6156,9 @@
           <a:p>
             <a:pPr>
               <a:spcAft>
-                <a:spcPts val="700"/>
+                <a:spcPts val="300"/>
               </a:spcAft>
-              <a:defRPr sz="1700">
+              <a:defRPr sz="1100">
                 <a:solidFill>
                   <a:srgbClr val="0D006A"/>
                 </a:solidFill>
@@ -6179,8 +6179,8 @@
         </p:nvSpPr>
         <p:spPr>
           <a:xfrm>
-            <a:off x="306000" y="2232000"/>
-            <a:ext cx="4194000" cy="208800"/>
+            <a:off x="306000" y="2278800"/>
+            <a:ext cx="4194000" cy="136800"/>
           </a:xfrm>
           <a:prstGeom prst="rect">
             <a:avLst/>
@@ -6224,8 +6224,8 @@
         </p:nvSpPr>
         <p:spPr>
           <a:xfrm>
-            <a:off x="378000" y="2264400"/>
-            <a:ext cx="4031999" cy="115200"/>
+            <a:off x="360000" y="2296800"/>
+            <a:ext cx="4086000" cy="79200"/>
           </a:xfrm>
           <a:prstGeom prst="rect">
             <a:avLst/>
@@ -6239,7 +6239,7 @@
           <a:lstStyle/>
           <a:p>
             <a:pPr>
-              <a:defRPr sz="1100" b="1">
+              <a:defRPr sz="800" b="1">
                 <a:solidFill>
                   <a:srgbClr val="F2F2F2"/>
                 </a:solidFill>
@@ -6260,7 +6260,7 @@
         </p:nvSpPr>
         <p:spPr>
           <a:xfrm>
-            <a:off x="0" y="2466000"/>
+            <a:off x="0" y="2538000"/>
             <a:ext cx="4799880" cy="18000"/>
           </a:xfrm>
           <a:prstGeom prst="rect">
@@ -6313,8 +6313,8 @@
         </p:blipFill>
         <p:spPr>
           <a:xfrm>
-            <a:off x="198000" y="2527200"/>
-            <a:ext cx="100543" cy="100800"/>
+            <a:off x="198000" y="2577600"/>
+            <a:ext cx="64635" cy="64800"/>
           </a:xfrm>
           <a:prstGeom prst="rect">
             <a:avLst/>
@@ -6329,8 +6329,8 @@
         </p:nvSpPr>
         <p:spPr>
           <a:xfrm>
-            <a:off x="3791880" y="2512800"/>
-            <a:ext cx="810000" cy="108000"/>
+            <a:off x="3791880" y="2566800"/>
+            <a:ext cx="810000" cy="79200"/>
           </a:xfrm>
           <a:prstGeom prst="rect">
             <a:avLst/>
@@ -6344,7 +6344,7 @@
           <a:lstStyle/>
           <a:p>
             <a:pPr algn="r">
-              <a:defRPr sz="800" b="0">
+              <a:defRPr sz="600" b="0">
                 <a:solidFill>
                   <a:srgbClr val="0D006A"/>
                 </a:solidFill>
@@ -6391,8 +6391,8 @@
         </p:nvSpPr>
         <p:spPr>
           <a:xfrm>
-            <a:off x="306000" y="198000"/>
-            <a:ext cx="4068000" cy="306000"/>
+            <a:off x="306000" y="151200"/>
+            <a:ext cx="4140000" cy="187200"/>
           </a:xfrm>
           <a:prstGeom prst="rect">
             <a:avLst/>
@@ -6406,7 +6406,7 @@
           <a:lstStyle/>
           <a:p>
             <a:pPr>
-              <a:defRPr sz="3300" b="1">
+              <a:defRPr sz="1800" b="1">
                 <a:solidFill>
                   <a:srgbClr val="0D006A"/>
                 </a:solidFill>
@@ -6427,8 +6427,8 @@
         </p:nvSpPr>
         <p:spPr>
           <a:xfrm>
-            <a:off x="306000" y="514800"/>
-            <a:ext cx="450000" cy="28800"/>
+            <a:off x="306000" y="367200"/>
+            <a:ext cx="378000" cy="18000"/>
           </a:xfrm>
           <a:prstGeom prst="rect">
             <a:avLst/>
@@ -6472,8 +6472,8 @@
         </p:nvSpPr>
         <p:spPr>
           <a:xfrm>
-            <a:off x="378000" y="666000"/>
-            <a:ext cx="3924000" cy="1530000"/>
+            <a:off x="378000" y="486000"/>
+            <a:ext cx="3996000" cy="1745999"/>
           </a:xfrm>
           <a:prstGeom prst="rect">
             <a:avLst/>
@@ -6488,9 +6488,9 @@
           <a:p>
             <a:pPr>
               <a:spcAft>
-                <a:spcPts val="700"/>
+                <a:spcPts val="300"/>
               </a:spcAft>
-              <a:defRPr sz="1700">
+              <a:defRPr sz="1100">
                 <a:solidFill>
                   <a:srgbClr val="0D006A"/>
                 </a:solidFill>
@@ -6504,9 +6504,9 @@
           <a:p>
             <a:pPr>
               <a:spcAft>
-                <a:spcPts val="700"/>
+                <a:spcPts val="300"/>
               </a:spcAft>
-              <a:defRPr sz="1700">
+              <a:defRPr sz="1100">
                 <a:solidFill>
                   <a:srgbClr val="0D006A"/>
                 </a:solidFill>
@@ -6520,9 +6520,9 @@
           <a:p>
             <a:pPr>
               <a:spcAft>
-                <a:spcPts val="700"/>
+                <a:spcPts val="300"/>
               </a:spcAft>
-              <a:defRPr sz="1700">
+              <a:defRPr sz="1100">
                 <a:solidFill>
                   <a:srgbClr val="0D006A"/>
                 </a:solidFill>
@@ -6536,9 +6536,9 @@
           <a:p>
             <a:pPr>
               <a:spcAft>
-                <a:spcPts val="700"/>
+                <a:spcPts val="300"/>
               </a:spcAft>
-              <a:defRPr sz="1700">
+              <a:defRPr sz="1100">
                 <a:solidFill>
                   <a:srgbClr val="0D006A"/>
                 </a:solidFill>
@@ -6552,9 +6552,9 @@
           <a:p>
             <a:pPr>
               <a:spcAft>
-                <a:spcPts val="700"/>
+                <a:spcPts val="300"/>
               </a:spcAft>
-              <a:defRPr sz="1700">
+              <a:defRPr sz="1100">
                 <a:solidFill>
                   <a:srgbClr val="0D006A"/>
                 </a:solidFill>
@@ -6575,8 +6575,8 @@
         </p:nvSpPr>
         <p:spPr>
           <a:xfrm>
-            <a:off x="306000" y="2232000"/>
-            <a:ext cx="4194000" cy="208800"/>
+            <a:off x="306000" y="2278800"/>
+            <a:ext cx="4194000" cy="136800"/>
           </a:xfrm>
           <a:prstGeom prst="rect">
             <a:avLst/>
@@ -6620,8 +6620,8 @@
         </p:nvSpPr>
         <p:spPr>
           <a:xfrm>
-            <a:off x="378000" y="2264400"/>
-            <a:ext cx="4031999" cy="115200"/>
+            <a:off x="360000" y="2296800"/>
+            <a:ext cx="4086000" cy="79200"/>
           </a:xfrm>
           <a:prstGeom prst="rect">
             <a:avLst/>
@@ -6635,7 +6635,7 @@
           <a:lstStyle/>
           <a:p>
             <a:pPr>
-              <a:defRPr sz="1100" b="1">
+              <a:defRPr sz="800" b="1">
                 <a:solidFill>
                   <a:srgbClr val="F2F2F2"/>
                 </a:solidFill>
@@ -6656,7 +6656,7 @@
         </p:nvSpPr>
         <p:spPr>
           <a:xfrm>
-            <a:off x="0" y="2466000"/>
+            <a:off x="0" y="2538000"/>
             <a:ext cx="4799880" cy="18000"/>
           </a:xfrm>
           <a:prstGeom prst="rect">
@@ -6709,8 +6709,8 @@
         </p:blipFill>
         <p:spPr>
           <a:xfrm>
-            <a:off x="198000" y="2527200"/>
-            <a:ext cx="100543" cy="100800"/>
+            <a:off x="198000" y="2577600"/>
+            <a:ext cx="64635" cy="64800"/>
           </a:xfrm>
           <a:prstGeom prst="rect">
             <a:avLst/>
@@ -6725,8 +6725,8 @@
         </p:nvSpPr>
         <p:spPr>
           <a:xfrm>
-            <a:off x="3791880" y="2512800"/>
-            <a:ext cx="810000" cy="108000"/>
+            <a:off x="3791880" y="2566800"/>
+            <a:ext cx="810000" cy="79200"/>
           </a:xfrm>
           <a:prstGeom prst="rect">
             <a:avLst/>
@@ -6740,7 +6740,7 @@
           <a:lstStyle/>
           <a:p>
             <a:pPr algn="r">
-              <a:defRPr sz="800" b="0">
+              <a:defRPr sz="600" b="0">
                 <a:solidFill>
                   <a:srgbClr val="0D006A"/>
                 </a:solidFill>
@@ -6787,8 +6787,8 @@
         </p:nvSpPr>
         <p:spPr>
           <a:xfrm>
-            <a:off x="306000" y="198000"/>
-            <a:ext cx="4068000" cy="306000"/>
+            <a:off x="306000" y="151200"/>
+            <a:ext cx="4140000" cy="187200"/>
           </a:xfrm>
           <a:prstGeom prst="rect">
             <a:avLst/>
@@ -6802,7 +6802,7 @@
           <a:lstStyle/>
           <a:p>
             <a:pPr>
-              <a:defRPr sz="3300" b="1">
+              <a:defRPr sz="1800" b="1">
                 <a:solidFill>
                   <a:srgbClr val="0D006A"/>
                 </a:solidFill>
@@ -6823,8 +6823,8 @@
         </p:nvSpPr>
         <p:spPr>
           <a:xfrm>
-            <a:off x="306000" y="514800"/>
-            <a:ext cx="450000" cy="28800"/>
+            <a:off x="306000" y="367200"/>
+            <a:ext cx="378000" cy="18000"/>
           </a:xfrm>
           <a:prstGeom prst="rect">
             <a:avLst/>
@@ -6868,8 +6868,8 @@
         </p:nvSpPr>
         <p:spPr>
           <a:xfrm>
-            <a:off x="378000" y="666000"/>
-            <a:ext cx="3924000" cy="1530000"/>
+            <a:off x="378000" y="486000"/>
+            <a:ext cx="3996000" cy="1745999"/>
           </a:xfrm>
           <a:prstGeom prst="rect">
             <a:avLst/>
@@ -6884,9 +6884,9 @@
           <a:p>
             <a:pPr>
               <a:spcAft>
-                <a:spcPts val="700"/>
+                <a:spcPts val="300"/>
               </a:spcAft>
-              <a:defRPr sz="1700">
+              <a:defRPr sz="1100">
                 <a:solidFill>
                   <a:srgbClr val="0D006A"/>
                 </a:solidFill>
@@ -6900,9 +6900,9 @@
           <a:p>
             <a:pPr>
               <a:spcAft>
-                <a:spcPts val="700"/>
+                <a:spcPts val="300"/>
               </a:spcAft>
-              <a:defRPr sz="1700">
+              <a:defRPr sz="1100">
                 <a:solidFill>
                   <a:srgbClr val="0D006A"/>
                 </a:solidFill>
@@ -6916,9 +6916,9 @@
           <a:p>
             <a:pPr>
               <a:spcAft>
-                <a:spcPts val="700"/>
+                <a:spcPts val="300"/>
               </a:spcAft>
-              <a:defRPr sz="1700">
+              <a:defRPr sz="1100">
                 <a:solidFill>
                   <a:srgbClr val="0D006A"/>
                 </a:solidFill>
@@ -6932,9 +6932,9 @@
           <a:p>
             <a:pPr>
               <a:spcAft>
-                <a:spcPts val="700"/>
+                <a:spcPts val="300"/>
               </a:spcAft>
-              <a:defRPr sz="1700">
+              <a:defRPr sz="1100">
                 <a:solidFill>
                   <a:srgbClr val="0D006A"/>
                 </a:solidFill>
@@ -6955,8 +6955,8 @@
         </p:nvSpPr>
         <p:spPr>
           <a:xfrm>
-            <a:off x="306000" y="2232000"/>
-            <a:ext cx="4194000" cy="208800"/>
+            <a:off x="306000" y="2278800"/>
+            <a:ext cx="4194000" cy="136800"/>
           </a:xfrm>
           <a:prstGeom prst="rect">
             <a:avLst/>
@@ -7000,8 +7000,8 @@
         </p:nvSpPr>
         <p:spPr>
           <a:xfrm>
-            <a:off x="378000" y="2264400"/>
-            <a:ext cx="4031999" cy="115200"/>
+            <a:off x="360000" y="2296800"/>
+            <a:ext cx="4086000" cy="79200"/>
           </a:xfrm>
           <a:prstGeom prst="rect">
             <a:avLst/>
@@ -7015,7 +7015,7 @@
           <a:lstStyle/>
           <a:p>
             <a:pPr>
-              <a:defRPr sz="1100" b="1">
+              <a:defRPr sz="800" b="1">
                 <a:solidFill>
                   <a:srgbClr val="F2F2F2"/>
                 </a:solidFill>
@@ -7036,7 +7036,7 @@
         </p:nvSpPr>
         <p:spPr>
           <a:xfrm>
-            <a:off x="0" y="2466000"/>
+            <a:off x="0" y="2538000"/>
             <a:ext cx="4799880" cy="18000"/>
           </a:xfrm>
           <a:prstGeom prst="rect">
@@ -7089,8 +7089,8 @@
         </p:blipFill>
         <p:spPr>
           <a:xfrm>
-            <a:off x="198000" y="2527200"/>
-            <a:ext cx="100543" cy="100800"/>
+            <a:off x="198000" y="2577600"/>
+            <a:ext cx="64635" cy="64800"/>
           </a:xfrm>
           <a:prstGeom prst="rect">
             <a:avLst/>
@@ -7105,8 +7105,8 @@
         </p:nvSpPr>
         <p:spPr>
           <a:xfrm>
-            <a:off x="3791880" y="2512800"/>
-            <a:ext cx="810000" cy="108000"/>
+            <a:off x="3791880" y="2566800"/>
+            <a:ext cx="810000" cy="79200"/>
           </a:xfrm>
           <a:prstGeom prst="rect">
             <a:avLst/>
@@ -7120,7 +7120,7 @@
           <a:lstStyle/>
           <a:p>
             <a:pPr algn="r">
-              <a:defRPr sz="800" b="0">
+              <a:defRPr sz="600" b="0">
                 <a:solidFill>
                   <a:srgbClr val="0D006A"/>
                 </a:solidFill>
@@ -7167,8 +7167,8 @@
         </p:nvSpPr>
         <p:spPr>
           <a:xfrm>
-            <a:off x="306000" y="198000"/>
-            <a:ext cx="4068000" cy="306000"/>
+            <a:off x="306000" y="151200"/>
+            <a:ext cx="4140000" cy="187200"/>
           </a:xfrm>
           <a:prstGeom prst="rect">
             <a:avLst/>
@@ -7182,7 +7182,7 @@
           <a:lstStyle/>
           <a:p>
             <a:pPr>
-              <a:defRPr sz="3300" b="1">
+              <a:defRPr sz="1800" b="1">
                 <a:solidFill>
                   <a:srgbClr val="0D006A"/>
                 </a:solidFill>
@@ -7203,8 +7203,8 @@
         </p:nvSpPr>
         <p:spPr>
           <a:xfrm>
-            <a:off x="306000" y="514800"/>
-            <a:ext cx="450000" cy="28800"/>
+            <a:off x="306000" y="367200"/>
+            <a:ext cx="378000" cy="18000"/>
           </a:xfrm>
           <a:prstGeom prst="rect">
             <a:avLst/>
@@ -7248,8 +7248,8 @@
         </p:nvSpPr>
         <p:spPr>
           <a:xfrm>
-            <a:off x="378000" y="666000"/>
-            <a:ext cx="3924000" cy="1530000"/>
+            <a:off x="378000" y="486000"/>
+            <a:ext cx="3996000" cy="1745999"/>
           </a:xfrm>
           <a:prstGeom prst="rect">
             <a:avLst/>
@@ -7264,9 +7264,9 @@
           <a:p>
             <a:pPr>
               <a:spcAft>
-                <a:spcPts val="700"/>
+                <a:spcPts val="300"/>
               </a:spcAft>
-              <a:defRPr sz="1700">
+              <a:defRPr sz="1100">
                 <a:solidFill>
                   <a:srgbClr val="0D006A"/>
                 </a:solidFill>
@@ -7280,9 +7280,9 @@
           <a:p>
             <a:pPr>
               <a:spcAft>
-                <a:spcPts val="700"/>
+                <a:spcPts val="300"/>
               </a:spcAft>
-              <a:defRPr sz="1700">
+              <a:defRPr sz="1100">
                 <a:solidFill>
                   <a:srgbClr val="0D006A"/>
                 </a:solidFill>
@@ -7296,9 +7296,9 @@
           <a:p>
             <a:pPr>
               <a:spcAft>
-                <a:spcPts val="700"/>
+                <a:spcPts val="300"/>
               </a:spcAft>
-              <a:defRPr sz="1700">
+              <a:defRPr sz="1100">
                 <a:solidFill>
                   <a:srgbClr val="0D006A"/>
                 </a:solidFill>
@@ -7312,9 +7312,9 @@
           <a:p>
             <a:pPr>
               <a:spcAft>
-                <a:spcPts val="700"/>
+                <a:spcPts val="300"/>
               </a:spcAft>
-              <a:defRPr sz="1700">
+              <a:defRPr sz="1100">
                 <a:solidFill>
                   <a:srgbClr val="0D006A"/>
                 </a:solidFill>
@@ -7328,9 +7328,9 @@
           <a:p>
             <a:pPr>
               <a:spcAft>
-                <a:spcPts val="700"/>
+                <a:spcPts val="300"/>
               </a:spcAft>
-              <a:defRPr sz="1700">
+              <a:defRPr sz="1100">
                 <a:solidFill>
                   <a:srgbClr val="0D006A"/>
                 </a:solidFill>
@@ -7351,8 +7351,8 @@
         </p:nvSpPr>
         <p:spPr>
           <a:xfrm>
-            <a:off x="306000" y="2232000"/>
-            <a:ext cx="4194000" cy="208800"/>
+            <a:off x="306000" y="2278800"/>
+            <a:ext cx="4194000" cy="136800"/>
           </a:xfrm>
           <a:prstGeom prst="rect">
             <a:avLst/>
@@ -7396,8 +7396,8 @@
         </p:nvSpPr>
         <p:spPr>
           <a:xfrm>
-            <a:off x="378000" y="2264400"/>
-            <a:ext cx="4031999" cy="115200"/>
+            <a:off x="360000" y="2296800"/>
+            <a:ext cx="4086000" cy="79200"/>
           </a:xfrm>
           <a:prstGeom prst="rect">
             <a:avLst/>
@@ -7411,7 +7411,7 @@
           <a:lstStyle/>
           <a:p>
             <a:pPr>
-              <a:defRPr sz="1100" b="1">
+              <a:defRPr sz="800" b="1">
                 <a:solidFill>
                   <a:srgbClr val="F2F2F2"/>
                 </a:solidFill>
@@ -7432,7 +7432,7 @@
         </p:nvSpPr>
         <p:spPr>
           <a:xfrm>
-            <a:off x="0" y="2466000"/>
+            <a:off x="0" y="2538000"/>
             <a:ext cx="4799880" cy="18000"/>
           </a:xfrm>
           <a:prstGeom prst="rect">
@@ -7485,8 +7485,8 @@
         </p:blipFill>
         <p:spPr>
           <a:xfrm>
-            <a:off x="198000" y="2527200"/>
-            <a:ext cx="100543" cy="100800"/>
+            <a:off x="198000" y="2577600"/>
+            <a:ext cx="64635" cy="64800"/>
           </a:xfrm>
           <a:prstGeom prst="rect">
             <a:avLst/>
@@ -7501,8 +7501,8 @@
         </p:nvSpPr>
         <p:spPr>
           <a:xfrm>
-            <a:off x="3791880" y="2512800"/>
-            <a:ext cx="810000" cy="108000"/>
+            <a:off x="3791880" y="2566800"/>
+            <a:ext cx="810000" cy="79200"/>
           </a:xfrm>
           <a:prstGeom prst="rect">
             <a:avLst/>
@@ -7516,7 +7516,7 @@
           <a:lstStyle/>
           <a:p>
             <a:pPr algn="r">
-              <a:defRPr sz="800" b="0">
+              <a:defRPr sz="600" b="0">
                 <a:solidFill>
                   <a:srgbClr val="0D006A"/>
                 </a:solidFill>
@@ -7563,8 +7563,8 @@
         </p:nvSpPr>
         <p:spPr>
           <a:xfrm>
-            <a:off x="306000" y="198000"/>
-            <a:ext cx="4068000" cy="306000"/>
+            <a:off x="306000" y="151200"/>
+            <a:ext cx="4140000" cy="187200"/>
           </a:xfrm>
           <a:prstGeom prst="rect">
             <a:avLst/>
@@ -7578,7 +7578,7 @@
           <a:lstStyle/>
           <a:p>
             <a:pPr>
-              <a:defRPr sz="3300" b="1">
+              <a:defRPr sz="1800" b="1">
                 <a:solidFill>
                   <a:srgbClr val="0D006A"/>
                 </a:solidFill>
@@ -7599,8 +7599,8 @@
         </p:nvSpPr>
         <p:spPr>
           <a:xfrm>
-            <a:off x="306000" y="514800"/>
-            <a:ext cx="450000" cy="28800"/>
+            <a:off x="306000" y="367200"/>
+            <a:ext cx="378000" cy="18000"/>
           </a:xfrm>
           <a:prstGeom prst="rect">
             <a:avLst/>
@@ -7644,8 +7644,8 @@
         </p:nvSpPr>
         <p:spPr>
           <a:xfrm>
-            <a:off x="378000" y="666000"/>
-            <a:ext cx="3924000" cy="1530000"/>
+            <a:off x="378000" y="486000"/>
+            <a:ext cx="3996000" cy="1745999"/>
           </a:xfrm>
           <a:prstGeom prst="rect">
             <a:avLst/>
@@ -7660,9 +7660,9 @@
           <a:p>
             <a:pPr>
               <a:spcAft>
-                <a:spcPts val="700"/>
+                <a:spcPts val="300"/>
               </a:spcAft>
-              <a:defRPr sz="1700">
+              <a:defRPr sz="1100">
                 <a:solidFill>
                   <a:srgbClr val="0D006A"/>
                 </a:solidFill>
@@ -7676,9 +7676,9 @@
           <a:p>
             <a:pPr>
               <a:spcAft>
-                <a:spcPts val="700"/>
+                <a:spcPts val="300"/>
               </a:spcAft>
-              <a:defRPr sz="1700">
+              <a:defRPr sz="1100">
                 <a:solidFill>
                   <a:srgbClr val="0D006A"/>
                 </a:solidFill>
@@ -7692,9 +7692,9 @@
           <a:p>
             <a:pPr>
               <a:spcAft>
-                <a:spcPts val="700"/>
+                <a:spcPts val="300"/>
               </a:spcAft>
-              <a:defRPr sz="1700">
+              <a:defRPr sz="1100">
                 <a:solidFill>
                   <a:srgbClr val="0D006A"/>
                 </a:solidFill>
@@ -7708,9 +7708,9 @@
           <a:p>
             <a:pPr>
               <a:spcAft>
-                <a:spcPts val="700"/>
+                <a:spcPts val="300"/>
               </a:spcAft>
-              <a:defRPr sz="1700">
+              <a:defRPr sz="1100">
                 <a:solidFill>
                   <a:srgbClr val="0D006A"/>
                 </a:solidFill>
@@ -7724,9 +7724,9 @@
           <a:p>
             <a:pPr>
               <a:spcAft>
-                <a:spcPts val="700"/>
+                <a:spcPts val="300"/>
               </a:spcAft>
-              <a:defRPr sz="1700">
+              <a:defRPr sz="1100">
                 <a:solidFill>
                   <a:srgbClr val="0D006A"/>
                 </a:solidFill>
@@ -7747,8 +7747,8 @@
         </p:nvSpPr>
         <p:spPr>
           <a:xfrm>
-            <a:off x="306000" y="2232000"/>
-            <a:ext cx="4194000" cy="208800"/>
+            <a:off x="306000" y="2278800"/>
+            <a:ext cx="4194000" cy="136800"/>
           </a:xfrm>
           <a:prstGeom prst="rect">
             <a:avLst/>
@@ -7792,8 +7792,8 @@
         </p:nvSpPr>
         <p:spPr>
           <a:xfrm>
-            <a:off x="378000" y="2264400"/>
-            <a:ext cx="4031999" cy="115200"/>
+            <a:off x="360000" y="2296800"/>
+            <a:ext cx="4086000" cy="79200"/>
           </a:xfrm>
           <a:prstGeom prst="rect">
             <a:avLst/>
@@ -7807,7 +7807,7 @@
           <a:lstStyle/>
           <a:p>
             <a:pPr>
-              <a:defRPr sz="1100" b="1">
+              <a:defRPr sz="800" b="1">
                 <a:solidFill>
                   <a:srgbClr val="F2F2F2"/>
                 </a:solidFill>
@@ -7828,7 +7828,7 @@
         </p:nvSpPr>
         <p:spPr>
           <a:xfrm>
-            <a:off x="0" y="2466000"/>
+            <a:off x="0" y="2538000"/>
             <a:ext cx="4799880" cy="18000"/>
           </a:xfrm>
           <a:prstGeom prst="rect">
@@ -7881,8 +7881,8 @@
         </p:blipFill>
         <p:spPr>
           <a:xfrm>
-            <a:off x="198000" y="2527200"/>
-            <a:ext cx="100543" cy="100800"/>
+            <a:off x="198000" y="2577600"/>
+            <a:ext cx="64635" cy="64800"/>
           </a:xfrm>
           <a:prstGeom prst="rect">
             <a:avLst/>
@@ -7897,8 +7897,8 @@
         </p:nvSpPr>
         <p:spPr>
           <a:xfrm>
-            <a:off x="3791880" y="2512800"/>
-            <a:ext cx="810000" cy="108000"/>
+            <a:off x="3791880" y="2566800"/>
+            <a:ext cx="810000" cy="79200"/>
           </a:xfrm>
           <a:prstGeom prst="rect">
             <a:avLst/>
@@ -7912,7 +7912,7 @@
           <a:lstStyle/>
           <a:p>
             <a:pPr algn="r">
-              <a:defRPr sz="800" b="0">
+              <a:defRPr sz="600" b="0">
                 <a:solidFill>
                   <a:srgbClr val="0D006A"/>
                 </a:solidFill>
@@ -7959,8 +7959,8 @@
         </p:nvSpPr>
         <p:spPr>
           <a:xfrm>
-            <a:off x="306000" y="198000"/>
-            <a:ext cx="4068000" cy="306000"/>
+            <a:off x="306000" y="151200"/>
+            <a:ext cx="4140000" cy="187200"/>
           </a:xfrm>
           <a:prstGeom prst="rect">
             <a:avLst/>
@@ -7974,7 +7974,7 @@
           <a:lstStyle/>
           <a:p>
             <a:pPr>
-              <a:defRPr sz="3300" b="1">
+              <a:defRPr sz="1800" b="1">
                 <a:solidFill>
                   <a:srgbClr val="0D006A"/>
                 </a:solidFill>
@@ -7995,8 +7995,8 @@
         </p:nvSpPr>
         <p:spPr>
           <a:xfrm>
-            <a:off x="306000" y="514800"/>
-            <a:ext cx="450000" cy="28800"/>
+            <a:off x="306000" y="367200"/>
+            <a:ext cx="378000" cy="18000"/>
           </a:xfrm>
           <a:prstGeom prst="rect">
             <a:avLst/>
@@ -8040,8 +8040,8 @@
         </p:nvSpPr>
         <p:spPr>
           <a:xfrm>
-            <a:off x="378000" y="666000"/>
-            <a:ext cx="3924000" cy="1530000"/>
+            <a:off x="378000" y="486000"/>
+            <a:ext cx="3996000" cy="1745999"/>
           </a:xfrm>
           <a:prstGeom prst="rect">
             <a:avLst/>
@@ -8056,9 +8056,9 @@
           <a:p>
             <a:pPr>
               <a:spcAft>
-                <a:spcPts val="700"/>
+                <a:spcPts val="300"/>
               </a:spcAft>
-              <a:defRPr sz="1700">
+              <a:defRPr sz="1100">
                 <a:solidFill>
                   <a:srgbClr val="0D006A"/>
                 </a:solidFill>
@@ -8072,9 +8072,9 @@
           <a:p>
             <a:pPr>
               <a:spcAft>
-                <a:spcPts val="700"/>
+                <a:spcPts val="300"/>
               </a:spcAft>
-              <a:defRPr sz="1700">
+              <a:defRPr sz="1100">
                 <a:solidFill>
                   <a:srgbClr val="0D006A"/>
                 </a:solidFill>
@@ -8088,9 +8088,9 @@
           <a:p>
             <a:pPr>
               <a:spcAft>
-                <a:spcPts val="700"/>
+                <a:spcPts val="300"/>
               </a:spcAft>
-              <a:defRPr sz="1700">
+              <a:defRPr sz="1100">
                 <a:solidFill>
                   <a:srgbClr val="0D006A"/>
                 </a:solidFill>
@@ -8104,9 +8104,9 @@
           <a:p>
             <a:pPr>
               <a:spcAft>
-                <a:spcPts val="700"/>
+                <a:spcPts val="300"/>
               </a:spcAft>
-              <a:defRPr sz="1700">
+              <a:defRPr sz="1100">
                 <a:solidFill>
                   <a:srgbClr val="0D006A"/>
                 </a:solidFill>
@@ -8127,8 +8127,8 @@
         </p:nvSpPr>
         <p:spPr>
           <a:xfrm>
-            <a:off x="306000" y="2232000"/>
-            <a:ext cx="4194000" cy="208800"/>
+            <a:off x="306000" y="2278800"/>
+            <a:ext cx="4194000" cy="136800"/>
           </a:xfrm>
           <a:prstGeom prst="rect">
             <a:avLst/>
@@ -8172,8 +8172,8 @@
         </p:nvSpPr>
         <p:spPr>
           <a:xfrm>
-            <a:off x="378000" y="2264400"/>
-            <a:ext cx="4031999" cy="115200"/>
+            <a:off x="360000" y="2296800"/>
+            <a:ext cx="4086000" cy="79200"/>
           </a:xfrm>
           <a:prstGeom prst="rect">
             <a:avLst/>
@@ -8187,7 +8187,7 @@
           <a:lstStyle/>
           <a:p>
             <a:pPr>
-              <a:defRPr sz="1100" b="1">
+              <a:defRPr sz="800" b="1">
                 <a:solidFill>
                   <a:srgbClr val="F2F2F2"/>
                 </a:solidFill>
@@ -8208,7 +8208,7 @@
         </p:nvSpPr>
         <p:spPr>
           <a:xfrm>
-            <a:off x="0" y="2466000"/>
+            <a:off x="0" y="2538000"/>
             <a:ext cx="4799880" cy="18000"/>
           </a:xfrm>
           <a:prstGeom prst="rect">
@@ -8261,8 +8261,8 @@
         </p:blipFill>
         <p:spPr>
           <a:xfrm>
-            <a:off x="198000" y="2527200"/>
-            <a:ext cx="100543" cy="100800"/>
+            <a:off x="198000" y="2577600"/>
+            <a:ext cx="64635" cy="64800"/>
           </a:xfrm>
           <a:prstGeom prst="rect">
             <a:avLst/>
@@ -8277,8 +8277,8 @@
         </p:nvSpPr>
         <p:spPr>
           <a:xfrm>
-            <a:off x="3791880" y="2512800"/>
-            <a:ext cx="810000" cy="108000"/>
+            <a:off x="3791880" y="2566800"/>
+            <a:ext cx="810000" cy="79200"/>
           </a:xfrm>
           <a:prstGeom prst="rect">
             <a:avLst/>
@@ -8292,7 +8292,7 @@
           <a:lstStyle/>
           <a:p>
             <a:pPr algn="r">
-              <a:defRPr sz="800" b="0">
+              <a:defRPr sz="600" b="0">
                 <a:solidFill>
                   <a:srgbClr val="0D006A"/>
                 </a:solidFill>
@@ -8339,8 +8339,8 @@
         </p:nvSpPr>
         <p:spPr>
           <a:xfrm>
-            <a:off x="306000" y="198000"/>
-            <a:ext cx="4068000" cy="306000"/>
+            <a:off x="306000" y="151200"/>
+            <a:ext cx="4140000" cy="187200"/>
           </a:xfrm>
           <a:prstGeom prst="rect">
             <a:avLst/>
@@ -8354,7 +8354,7 @@
           <a:lstStyle/>
           <a:p>
             <a:pPr>
-              <a:defRPr sz="3300" b="1">
+              <a:defRPr sz="1800" b="1">
                 <a:solidFill>
                   <a:srgbClr val="0D006A"/>
                 </a:solidFill>
@@ -8375,8 +8375,8 @@
         </p:nvSpPr>
         <p:spPr>
           <a:xfrm>
-            <a:off x="306000" y="514800"/>
-            <a:ext cx="450000" cy="28800"/>
+            <a:off x="306000" y="367200"/>
+            <a:ext cx="378000" cy="18000"/>
           </a:xfrm>
           <a:prstGeom prst="rect">
             <a:avLst/>
@@ -8420,8 +8420,8 @@
         </p:nvSpPr>
         <p:spPr>
           <a:xfrm>
-            <a:off x="378000" y="666000"/>
-            <a:ext cx="3924000" cy="1530000"/>
+            <a:off x="378000" y="486000"/>
+            <a:ext cx="3996000" cy="1745999"/>
           </a:xfrm>
           <a:prstGeom prst="rect">
             <a:avLst/>
@@ -8436,9 +8436,9 @@
           <a:p>
             <a:pPr>
               <a:spcAft>
-                <a:spcPts val="700"/>
+                <a:spcPts val="300"/>
               </a:spcAft>
-              <a:defRPr sz="1700">
+              <a:defRPr sz="1100">
                 <a:solidFill>
                   <a:srgbClr val="0D006A"/>
                 </a:solidFill>
@@ -8452,9 +8452,9 @@
           <a:p>
             <a:pPr>
               <a:spcAft>
-                <a:spcPts val="700"/>
+                <a:spcPts val="300"/>
               </a:spcAft>
-              <a:defRPr sz="1700">
+              <a:defRPr sz="1100">
                 <a:solidFill>
                   <a:srgbClr val="0D006A"/>
                 </a:solidFill>
@@ -8468,9 +8468,9 @@
           <a:p>
             <a:pPr>
               <a:spcAft>
-                <a:spcPts val="700"/>
+                <a:spcPts val="300"/>
               </a:spcAft>
-              <a:defRPr sz="1700">
+              <a:defRPr sz="1100">
                 <a:solidFill>
                   <a:srgbClr val="0D006A"/>
                 </a:solidFill>
@@ -8484,9 +8484,9 @@
           <a:p>
             <a:pPr>
               <a:spcAft>
-                <a:spcPts val="700"/>
+                <a:spcPts val="300"/>
               </a:spcAft>
-              <a:defRPr sz="1700">
+              <a:defRPr sz="1100">
                 <a:solidFill>
                   <a:srgbClr val="0D006A"/>
                 </a:solidFill>
@@ -8500,9 +8500,9 @@
           <a:p>
             <a:pPr>
               <a:spcAft>
-                <a:spcPts val="700"/>
+                <a:spcPts val="300"/>
               </a:spcAft>
-              <a:defRPr sz="1700">
+              <a:defRPr sz="1100">
                 <a:solidFill>
                   <a:srgbClr val="0D006A"/>
                 </a:solidFill>
@@ -8523,8 +8523,8 @@
         </p:nvSpPr>
         <p:spPr>
           <a:xfrm>
-            <a:off x="306000" y="2232000"/>
-            <a:ext cx="4194000" cy="208800"/>
+            <a:off x="306000" y="2278800"/>
+            <a:ext cx="4194000" cy="136800"/>
           </a:xfrm>
           <a:prstGeom prst="rect">
             <a:avLst/>
@@ -8568,8 +8568,8 @@
         </p:nvSpPr>
         <p:spPr>
           <a:xfrm>
-            <a:off x="378000" y="2264400"/>
-            <a:ext cx="4031999" cy="115200"/>
+            <a:off x="360000" y="2296800"/>
+            <a:ext cx="4086000" cy="79200"/>
           </a:xfrm>
           <a:prstGeom prst="rect">
             <a:avLst/>
@@ -8583,7 +8583,7 @@
           <a:lstStyle/>
           <a:p>
             <a:pPr>
-              <a:defRPr sz="1100" b="1">
+              <a:defRPr sz="800" b="1">
                 <a:solidFill>
                   <a:srgbClr val="F2F2F2"/>
                 </a:solidFill>
@@ -8604,7 +8604,7 @@
         </p:nvSpPr>
         <p:spPr>
           <a:xfrm>
-            <a:off x="0" y="2466000"/>
+            <a:off x="0" y="2538000"/>
             <a:ext cx="4799880" cy="18000"/>
           </a:xfrm>
           <a:prstGeom prst="rect">
@@ -8657,8 +8657,8 @@
         </p:blipFill>
         <p:spPr>
           <a:xfrm>
-            <a:off x="198000" y="2527200"/>
-            <a:ext cx="100543" cy="100800"/>
+            <a:off x="198000" y="2577600"/>
+            <a:ext cx="64635" cy="64800"/>
           </a:xfrm>
           <a:prstGeom prst="rect">
             <a:avLst/>
@@ -8673,8 +8673,8 @@
         </p:nvSpPr>
         <p:spPr>
           <a:xfrm>
-            <a:off x="3791880" y="2512800"/>
-            <a:ext cx="810000" cy="108000"/>
+            <a:off x="3791880" y="2566800"/>
+            <a:ext cx="810000" cy="79200"/>
           </a:xfrm>
           <a:prstGeom prst="rect">
             <a:avLst/>
@@ -8688,7 +8688,7 @@
           <a:lstStyle/>
           <a:p>
             <a:pPr algn="r">
-              <a:defRPr sz="800" b="0">
+              <a:defRPr sz="600" b="0">
                 <a:solidFill>
                   <a:srgbClr val="0D006A"/>
                 </a:solidFill>
@@ -8735,8 +8735,8 @@
         </p:nvSpPr>
         <p:spPr>
           <a:xfrm>
-            <a:off x="306000" y="198000"/>
-            <a:ext cx="4068000" cy="306000"/>
+            <a:off x="306000" y="151200"/>
+            <a:ext cx="4140000" cy="187200"/>
           </a:xfrm>
           <a:prstGeom prst="rect">
             <a:avLst/>
@@ -8750,7 +8750,7 @@
           <a:lstStyle/>
           <a:p>
             <a:pPr>
-              <a:defRPr sz="3300" b="1">
+              <a:defRPr sz="1800" b="1">
                 <a:solidFill>
                   <a:srgbClr val="0D006A"/>
                 </a:solidFill>
@@ -8771,8 +8771,8 @@
         </p:nvSpPr>
         <p:spPr>
           <a:xfrm>
-            <a:off x="306000" y="514800"/>
-            <a:ext cx="450000" cy="28800"/>
+            <a:off x="306000" y="367200"/>
+            <a:ext cx="378000" cy="18000"/>
           </a:xfrm>
           <a:prstGeom prst="rect">
             <a:avLst/>
@@ -8816,8 +8816,8 @@
         </p:nvSpPr>
         <p:spPr>
           <a:xfrm>
-            <a:off x="360000" y="666000"/>
-            <a:ext cx="1890000" cy="1422000"/>
+            <a:off x="360000" y="486000"/>
+            <a:ext cx="1962000" cy="1745999"/>
           </a:xfrm>
           <a:prstGeom prst="rect">
             <a:avLst/>
@@ -8832,9 +8832,9 @@
           <a:p>
             <a:pPr>
               <a:spcAft>
-                <a:spcPts val="700"/>
+                <a:spcPts val="300"/>
               </a:spcAft>
-              <a:defRPr sz="1500">
+              <a:defRPr sz="1000">
                 <a:solidFill>
                   <a:srgbClr val="0D006A"/>
                 </a:solidFill>
@@ -8848,9 +8848,9 @@
           <a:p>
             <a:pPr>
               <a:spcAft>
-                <a:spcPts val="700"/>
+                <a:spcPts val="300"/>
               </a:spcAft>
-              <a:defRPr sz="1500">
+              <a:defRPr sz="1000">
                 <a:solidFill>
                   <a:srgbClr val="0D006A"/>
                 </a:solidFill>
@@ -8871,8 +8871,8 @@
         </p:nvSpPr>
         <p:spPr>
           <a:xfrm>
-            <a:off x="2502000" y="666000"/>
-            <a:ext cx="1890000" cy="1422000"/>
+            <a:off x="2484000" y="486000"/>
+            <a:ext cx="1962000" cy="1745999"/>
           </a:xfrm>
           <a:prstGeom prst="rect">
             <a:avLst/>
@@ -8887,9 +8887,9 @@
           <a:p>
             <a:pPr>
               <a:spcAft>
-                <a:spcPts val="700"/>
+                <a:spcPts val="300"/>
               </a:spcAft>
-              <a:defRPr sz="1500">
+              <a:defRPr sz="1000">
                 <a:solidFill>
                   <a:srgbClr val="0D006A"/>
                 </a:solidFill>
@@ -8903,9 +8903,9 @@
           <a:p>
             <a:pPr>
               <a:spcAft>
-                <a:spcPts val="700"/>
+                <a:spcPts val="300"/>
               </a:spcAft>
-              <a:defRPr sz="1500">
+              <a:defRPr sz="1000">
                 <a:solidFill>
                   <a:srgbClr val="0D006A"/>
                 </a:solidFill>
@@ -8926,8 +8926,8 @@
         </p:nvSpPr>
         <p:spPr>
           <a:xfrm>
-            <a:off x="306000" y="2232000"/>
-            <a:ext cx="4194000" cy="208800"/>
+            <a:off x="306000" y="2278800"/>
+            <a:ext cx="4194000" cy="136800"/>
           </a:xfrm>
           <a:prstGeom prst="rect">
             <a:avLst/>
@@ -8971,8 +8971,8 @@
         </p:nvSpPr>
         <p:spPr>
           <a:xfrm>
-            <a:off x="378000" y="2264400"/>
-            <a:ext cx="4031999" cy="115200"/>
+            <a:off x="360000" y="2296800"/>
+            <a:ext cx="4086000" cy="79200"/>
           </a:xfrm>
           <a:prstGeom prst="rect">
             <a:avLst/>
@@ -8986,7 +8986,7 @@
           <a:lstStyle/>
           <a:p>
             <a:pPr>
-              <a:defRPr sz="1100" b="1">
+              <a:defRPr sz="800" b="1">
                 <a:solidFill>
                   <a:srgbClr val="F2F2F2"/>
                 </a:solidFill>
@@ -9007,7 +9007,7 @@
         </p:nvSpPr>
         <p:spPr>
           <a:xfrm>
-            <a:off x="0" y="2466000"/>
+            <a:off x="0" y="2538000"/>
             <a:ext cx="4799880" cy="18000"/>
           </a:xfrm>
           <a:prstGeom prst="rect">
@@ -9060,8 +9060,8 @@
         </p:blipFill>
         <p:spPr>
           <a:xfrm>
-            <a:off x="198000" y="2527200"/>
-            <a:ext cx="100543" cy="100800"/>
+            <a:off x="198000" y="2577600"/>
+            <a:ext cx="64635" cy="64800"/>
           </a:xfrm>
           <a:prstGeom prst="rect">
             <a:avLst/>
@@ -9076,8 +9076,8 @@
         </p:nvSpPr>
         <p:spPr>
           <a:xfrm>
-            <a:off x="3791880" y="2512800"/>
-            <a:ext cx="810000" cy="108000"/>
+            <a:off x="3791880" y="2566800"/>
+            <a:ext cx="810000" cy="79200"/>
           </a:xfrm>
           <a:prstGeom prst="rect">
             <a:avLst/>
@@ -9091,7 +9091,7 @@
           <a:lstStyle/>
           <a:p>
             <a:pPr algn="r">
-              <a:defRPr sz="800" b="0">
+              <a:defRPr sz="600" b="0">
                 <a:solidFill>
                   <a:srgbClr val="0D006A"/>
                 </a:solidFill>
@@ -9138,8 +9138,8 @@
         </p:nvSpPr>
         <p:spPr>
           <a:xfrm>
-            <a:off x="306000" y="198000"/>
-            <a:ext cx="4068000" cy="306000"/>
+            <a:off x="306000" y="151200"/>
+            <a:ext cx="4140000" cy="187200"/>
           </a:xfrm>
           <a:prstGeom prst="rect">
             <a:avLst/>
@@ -9153,7 +9153,7 @@
           <a:lstStyle/>
           <a:p>
             <a:pPr>
-              <a:defRPr sz="3300" b="1">
+              <a:defRPr sz="1800" b="1">
                 <a:solidFill>
                   <a:srgbClr val="0D006A"/>
                 </a:solidFill>
@@ -9174,8 +9174,8 @@
         </p:nvSpPr>
         <p:spPr>
           <a:xfrm>
-            <a:off x="306000" y="514800"/>
-            <a:ext cx="450000" cy="28800"/>
+            <a:off x="306000" y="367200"/>
+            <a:ext cx="378000" cy="18000"/>
           </a:xfrm>
           <a:prstGeom prst="rect">
             <a:avLst/>
@@ -9219,8 +9219,8 @@
         </p:nvSpPr>
         <p:spPr>
           <a:xfrm>
-            <a:off x="378000" y="666000"/>
-            <a:ext cx="3924000" cy="1530000"/>
+            <a:off x="378000" y="486000"/>
+            <a:ext cx="3996000" cy="1745999"/>
           </a:xfrm>
           <a:prstGeom prst="rect">
             <a:avLst/>
@@ -9235,9 +9235,9 @@
           <a:p>
             <a:pPr>
               <a:spcAft>
-                <a:spcPts val="700"/>
+                <a:spcPts val="300"/>
               </a:spcAft>
-              <a:defRPr sz="1700">
+              <a:defRPr sz="1100">
                 <a:solidFill>
                   <a:srgbClr val="0D006A"/>
                 </a:solidFill>
@@ -9251,9 +9251,9 @@
           <a:p>
             <a:pPr>
               <a:spcAft>
-                <a:spcPts val="700"/>
+                <a:spcPts val="300"/>
               </a:spcAft>
-              <a:defRPr sz="1700">
+              <a:defRPr sz="1100">
                 <a:solidFill>
                   <a:srgbClr val="0D006A"/>
                 </a:solidFill>
@@ -9267,9 +9267,9 @@
           <a:p>
             <a:pPr>
               <a:spcAft>
-                <a:spcPts val="700"/>
+                <a:spcPts val="300"/>
               </a:spcAft>
-              <a:defRPr sz="1700">
+              <a:defRPr sz="1100">
                 <a:solidFill>
                   <a:srgbClr val="0D006A"/>
                 </a:solidFill>
@@ -9283,9 +9283,9 @@
           <a:p>
             <a:pPr>
               <a:spcAft>
-                <a:spcPts val="700"/>
+                <a:spcPts val="300"/>
               </a:spcAft>
-              <a:defRPr sz="1700">
+              <a:defRPr sz="1100">
                 <a:solidFill>
                   <a:srgbClr val="0D006A"/>
                 </a:solidFill>
@@ -9299,9 +9299,9 @@
           <a:p>
             <a:pPr>
               <a:spcAft>
-                <a:spcPts val="700"/>
+                <a:spcPts val="300"/>
               </a:spcAft>
-              <a:defRPr sz="1700">
+              <a:defRPr sz="1100">
                 <a:solidFill>
                   <a:srgbClr val="0D006A"/>
                 </a:solidFill>
@@ -9322,8 +9322,8 @@
         </p:nvSpPr>
         <p:spPr>
           <a:xfrm>
-            <a:off x="306000" y="2232000"/>
-            <a:ext cx="4194000" cy="208800"/>
+            <a:off x="306000" y="2278800"/>
+            <a:ext cx="4194000" cy="136800"/>
           </a:xfrm>
           <a:prstGeom prst="rect">
             <a:avLst/>
@@ -9367,8 +9367,8 @@
         </p:nvSpPr>
         <p:spPr>
           <a:xfrm>
-            <a:off x="378000" y="2264400"/>
-            <a:ext cx="4031999" cy="115200"/>
+            <a:off x="360000" y="2296800"/>
+            <a:ext cx="4086000" cy="79200"/>
           </a:xfrm>
           <a:prstGeom prst="rect">
             <a:avLst/>
@@ -9382,7 +9382,7 @@
           <a:lstStyle/>
           <a:p>
             <a:pPr>
-              <a:defRPr sz="1100" b="1">
+              <a:defRPr sz="800" b="1">
                 <a:solidFill>
                   <a:srgbClr val="F2F2F2"/>
                 </a:solidFill>
@@ -9403,7 +9403,7 @@
         </p:nvSpPr>
         <p:spPr>
           <a:xfrm>
-            <a:off x="0" y="2466000"/>
+            <a:off x="0" y="2538000"/>
             <a:ext cx="4799880" cy="18000"/>
           </a:xfrm>
           <a:prstGeom prst="rect">
@@ -9456,8 +9456,8 @@
         </p:blipFill>
         <p:spPr>
           <a:xfrm>
-            <a:off x="198000" y="2527200"/>
-            <a:ext cx="100543" cy="100800"/>
+            <a:off x="198000" y="2577600"/>
+            <a:ext cx="64635" cy="64800"/>
           </a:xfrm>
           <a:prstGeom prst="rect">
             <a:avLst/>
@@ -9472,8 +9472,8 @@
         </p:nvSpPr>
         <p:spPr>
           <a:xfrm>
-            <a:off x="3791880" y="2512800"/>
-            <a:ext cx="810000" cy="108000"/>
+            <a:off x="3791880" y="2566800"/>
+            <a:ext cx="810000" cy="79200"/>
           </a:xfrm>
           <a:prstGeom prst="rect">
             <a:avLst/>
@@ -9487,7 +9487,7 @@
           <a:lstStyle/>
           <a:p>
             <a:pPr algn="r">
-              <a:defRPr sz="800" b="0">
+              <a:defRPr sz="600" b="0">
                 <a:solidFill>
                   <a:srgbClr val="0D006A"/>
                 </a:solidFill>
@@ -9534,8 +9534,8 @@
         </p:nvSpPr>
         <p:spPr>
           <a:xfrm>
-            <a:off x="306000" y="198000"/>
-            <a:ext cx="4068000" cy="306000"/>
+            <a:off x="306000" y="151200"/>
+            <a:ext cx="4140000" cy="187200"/>
           </a:xfrm>
           <a:prstGeom prst="rect">
             <a:avLst/>
@@ -9549,7 +9549,7 @@
           <a:lstStyle/>
           <a:p>
             <a:pPr>
-              <a:defRPr sz="3300" b="1">
+              <a:defRPr sz="1800" b="1">
                 <a:solidFill>
                   <a:srgbClr val="0D006A"/>
                 </a:solidFill>
@@ -9570,8 +9570,8 @@
         </p:nvSpPr>
         <p:spPr>
           <a:xfrm>
-            <a:off x="306000" y="514800"/>
-            <a:ext cx="450000" cy="28800"/>
+            <a:off x="306000" y="367200"/>
+            <a:ext cx="378000" cy="18000"/>
           </a:xfrm>
           <a:prstGeom prst="rect">
             <a:avLst/>
@@ -9615,8 +9615,8 @@
         </p:nvSpPr>
         <p:spPr>
           <a:xfrm>
-            <a:off x="378000" y="630000"/>
-            <a:ext cx="208800" cy="208800"/>
+            <a:off x="360000" y="486000"/>
+            <a:ext cx="151200" cy="151200"/>
           </a:xfrm>
           <a:prstGeom prst="rect">
             <a:avLst/>
@@ -9660,8 +9660,8 @@
         </p:nvSpPr>
         <p:spPr>
           <a:xfrm>
-            <a:off x="378000" y="648000"/>
-            <a:ext cx="208800" cy="125999"/>
+            <a:off x="360000" y="496800"/>
+            <a:ext cx="151200" cy="90000"/>
           </a:xfrm>
           <a:prstGeom prst="rect">
             <a:avLst/>
@@ -9675,7 +9675,7 @@
           <a:lstStyle/>
           <a:p>
             <a:pPr algn="ctr">
-              <a:defRPr sz="1200" b="1">
+              <a:defRPr sz="700" b="1">
                 <a:solidFill>
                   <a:srgbClr val="F2F2F2"/>
                 </a:solidFill>
@@ -9696,8 +9696,8 @@
         </p:nvSpPr>
         <p:spPr>
           <a:xfrm>
-            <a:off x="684000" y="622800"/>
-            <a:ext cx="3671999" cy="223200"/>
+            <a:off x="612000" y="478800"/>
+            <a:ext cx="3851999" cy="151200"/>
           </a:xfrm>
           <a:prstGeom prst="rect">
             <a:avLst/>
@@ -9711,7 +9711,7 @@
           <a:lstStyle/>
           <a:p>
             <a:pPr>
-              <a:defRPr sz="1500" b="0">
+              <a:defRPr sz="1000" b="0">
                 <a:solidFill>
                   <a:srgbClr val="0D006A"/>
                 </a:solidFill>
@@ -9732,8 +9732,8 @@
         </p:nvSpPr>
         <p:spPr>
           <a:xfrm>
-            <a:off x="378000" y="889199"/>
-            <a:ext cx="208800" cy="208800"/>
+            <a:off x="360000" y="694800"/>
+            <a:ext cx="151200" cy="151200"/>
           </a:xfrm>
           <a:prstGeom prst="rect">
             <a:avLst/>
@@ -9777,8 +9777,8 @@
         </p:nvSpPr>
         <p:spPr>
           <a:xfrm>
-            <a:off x="378000" y="907199"/>
-            <a:ext cx="208800" cy="125999"/>
+            <a:off x="360000" y="705600"/>
+            <a:ext cx="151200" cy="90000"/>
           </a:xfrm>
           <a:prstGeom prst="rect">
             <a:avLst/>
@@ -9792,7 +9792,7 @@
           <a:lstStyle/>
           <a:p>
             <a:pPr algn="ctr">
-              <a:defRPr sz="1200" b="1">
+              <a:defRPr sz="700" b="1">
                 <a:solidFill>
                   <a:srgbClr val="F2F2F2"/>
                 </a:solidFill>
@@ -9813,8 +9813,8 @@
         </p:nvSpPr>
         <p:spPr>
           <a:xfrm>
-            <a:off x="684000" y="881999"/>
-            <a:ext cx="3671999" cy="223200"/>
+            <a:off x="612000" y="687600"/>
+            <a:ext cx="3851999" cy="151200"/>
           </a:xfrm>
           <a:prstGeom prst="rect">
             <a:avLst/>
@@ -9828,7 +9828,7 @@
           <a:lstStyle/>
           <a:p>
             <a:pPr>
-              <a:defRPr sz="1500" b="0">
+              <a:defRPr sz="1000" b="0">
                 <a:solidFill>
                   <a:srgbClr val="0D006A"/>
                 </a:solidFill>
@@ -9849,8 +9849,8 @@
         </p:nvSpPr>
         <p:spPr>
           <a:xfrm>
-            <a:off x="378000" y="1148399"/>
-            <a:ext cx="208800" cy="208800"/>
+            <a:off x="360000" y="903600"/>
+            <a:ext cx="151200" cy="151200"/>
           </a:xfrm>
           <a:prstGeom prst="rect">
             <a:avLst/>
@@ -9894,8 +9894,8 @@
         </p:nvSpPr>
         <p:spPr>
           <a:xfrm>
-            <a:off x="378000" y="1166399"/>
-            <a:ext cx="208800" cy="125999"/>
+            <a:off x="360000" y="914400"/>
+            <a:ext cx="151200" cy="90000"/>
           </a:xfrm>
           <a:prstGeom prst="rect">
             <a:avLst/>
@@ -9909,7 +9909,7 @@
           <a:lstStyle/>
           <a:p>
             <a:pPr algn="ctr">
-              <a:defRPr sz="1200" b="1">
+              <a:defRPr sz="700" b="1">
                 <a:solidFill>
                   <a:srgbClr val="F2F2F2"/>
                 </a:solidFill>
@@ -9930,8 +9930,8 @@
         </p:nvSpPr>
         <p:spPr>
           <a:xfrm>
-            <a:off x="684000" y="1141199"/>
-            <a:ext cx="3671999" cy="223200"/>
+            <a:off x="612000" y="896400"/>
+            <a:ext cx="3851999" cy="151200"/>
           </a:xfrm>
           <a:prstGeom prst="rect">
             <a:avLst/>
@@ -9945,7 +9945,7 @@
           <a:lstStyle/>
           <a:p>
             <a:pPr>
-              <a:defRPr sz="1500" b="0">
+              <a:defRPr sz="1000" b="0">
                 <a:solidFill>
                   <a:srgbClr val="0D006A"/>
                 </a:solidFill>
@@ -9966,8 +9966,8 @@
         </p:nvSpPr>
         <p:spPr>
           <a:xfrm>
-            <a:off x="378000" y="1407599"/>
-            <a:ext cx="208800" cy="208800"/>
+            <a:off x="360000" y="1112400"/>
+            <a:ext cx="151200" cy="151200"/>
           </a:xfrm>
           <a:prstGeom prst="rect">
             <a:avLst/>
@@ -10011,8 +10011,8 @@
         </p:nvSpPr>
         <p:spPr>
           <a:xfrm>
-            <a:off x="378000" y="1425599"/>
-            <a:ext cx="208800" cy="125999"/>
+            <a:off x="360000" y="1123200"/>
+            <a:ext cx="151200" cy="90000"/>
           </a:xfrm>
           <a:prstGeom prst="rect">
             <a:avLst/>
@@ -10026,7 +10026,7 @@
           <a:lstStyle/>
           <a:p>
             <a:pPr algn="ctr">
-              <a:defRPr sz="1200" b="1">
+              <a:defRPr sz="700" b="1">
                 <a:solidFill>
                   <a:srgbClr val="F2F2F2"/>
                 </a:solidFill>
@@ -10047,8 +10047,8 @@
         </p:nvSpPr>
         <p:spPr>
           <a:xfrm>
-            <a:off x="684000" y="1400399"/>
-            <a:ext cx="3671999" cy="223200"/>
+            <a:off x="612000" y="1105200"/>
+            <a:ext cx="3851999" cy="151200"/>
           </a:xfrm>
           <a:prstGeom prst="rect">
             <a:avLst/>
@@ -10062,7 +10062,7 @@
           <a:lstStyle/>
           <a:p>
             <a:pPr>
-              <a:defRPr sz="1500" b="0">
+              <a:defRPr sz="1000" b="0">
                 <a:solidFill>
                   <a:srgbClr val="0D006A"/>
                 </a:solidFill>
@@ -10083,8 +10083,8 @@
         </p:nvSpPr>
         <p:spPr>
           <a:xfrm>
-            <a:off x="378000" y="1666799"/>
-            <a:ext cx="208800" cy="208800"/>
+            <a:off x="360000" y="1321200"/>
+            <a:ext cx="151200" cy="151200"/>
           </a:xfrm>
           <a:prstGeom prst="rect">
             <a:avLst/>
@@ -10128,8 +10128,8 @@
         </p:nvSpPr>
         <p:spPr>
           <a:xfrm>
-            <a:off x="378000" y="1684799"/>
-            <a:ext cx="208800" cy="125999"/>
+            <a:off x="360000" y="1332000"/>
+            <a:ext cx="151200" cy="90000"/>
           </a:xfrm>
           <a:prstGeom prst="rect">
             <a:avLst/>
@@ -10143,7 +10143,7 @@
           <a:lstStyle/>
           <a:p>
             <a:pPr algn="ctr">
-              <a:defRPr sz="1200" b="1">
+              <a:defRPr sz="700" b="1">
                 <a:solidFill>
                   <a:srgbClr val="F2F2F2"/>
                 </a:solidFill>
@@ -10164,8 +10164,8 @@
         </p:nvSpPr>
         <p:spPr>
           <a:xfrm>
-            <a:off x="684000" y="1659599"/>
-            <a:ext cx="3671999" cy="223200"/>
+            <a:off x="612000" y="1314000"/>
+            <a:ext cx="3851999" cy="151200"/>
           </a:xfrm>
           <a:prstGeom prst="rect">
             <a:avLst/>
@@ -10179,7 +10179,7 @@
           <a:lstStyle/>
           <a:p>
             <a:pPr>
-              <a:defRPr sz="1500" b="0">
+              <a:defRPr sz="1000" b="0">
                 <a:solidFill>
                   <a:srgbClr val="0D006A"/>
                 </a:solidFill>
@@ -10200,7 +10200,7 @@
         </p:nvSpPr>
         <p:spPr>
           <a:xfrm>
-            <a:off x="0" y="2466000"/>
+            <a:off x="0" y="2538000"/>
             <a:ext cx="4799880" cy="18000"/>
           </a:xfrm>
           <a:prstGeom prst="rect">
@@ -10253,8 +10253,8 @@
         </p:blipFill>
         <p:spPr>
           <a:xfrm>
-            <a:off x="198000" y="2527200"/>
-            <a:ext cx="100543" cy="100800"/>
+            <a:off x="198000" y="2577600"/>
+            <a:ext cx="64635" cy="64800"/>
           </a:xfrm>
           <a:prstGeom prst="rect">
             <a:avLst/>
@@ -10269,8 +10269,8 @@
         </p:nvSpPr>
         <p:spPr>
           <a:xfrm>
-            <a:off x="3791880" y="2512800"/>
-            <a:ext cx="810000" cy="108000"/>
+            <a:off x="3791880" y="2566800"/>
+            <a:ext cx="810000" cy="79200"/>
           </a:xfrm>
           <a:prstGeom prst="rect">
             <a:avLst/>
@@ -10284,7 +10284,7 @@
           <a:lstStyle/>
           <a:p>
             <a:pPr algn="r">
-              <a:defRPr sz="800" b="0">
+              <a:defRPr sz="600" b="0">
                 <a:solidFill>
                   <a:srgbClr val="0D006A"/>
                 </a:solidFill>
@@ -10331,8 +10331,8 @@
         </p:nvSpPr>
         <p:spPr>
           <a:xfrm>
-            <a:off x="306000" y="198000"/>
-            <a:ext cx="4068000" cy="306000"/>
+            <a:off x="306000" y="151200"/>
+            <a:ext cx="4140000" cy="187200"/>
           </a:xfrm>
           <a:prstGeom prst="rect">
             <a:avLst/>
@@ -10346,7 +10346,7 @@
           <a:lstStyle/>
           <a:p>
             <a:pPr>
-              <a:defRPr sz="3300" b="1">
+              <a:defRPr sz="1800" b="1">
                 <a:solidFill>
                   <a:srgbClr val="0D006A"/>
                 </a:solidFill>
@@ -10367,8 +10367,8 @@
         </p:nvSpPr>
         <p:spPr>
           <a:xfrm>
-            <a:off x="306000" y="514800"/>
-            <a:ext cx="450000" cy="28800"/>
+            <a:off x="306000" y="367200"/>
+            <a:ext cx="378000" cy="18000"/>
           </a:xfrm>
           <a:prstGeom prst="rect">
             <a:avLst/>
@@ -10412,8 +10412,8 @@
         </p:nvSpPr>
         <p:spPr>
           <a:xfrm>
-            <a:off x="396000" y="737999"/>
-            <a:ext cx="1872000" cy="1530000"/>
+            <a:off x="360000" y="522000"/>
+            <a:ext cx="1962000" cy="1800000"/>
           </a:xfrm>
           <a:prstGeom prst="rect">
             <a:avLst/>
@@ -10428,9 +10428,9 @@
           <a:p>
             <a:pPr>
               <a:spcAft>
-                <a:spcPts val="700"/>
+                <a:spcPts val="300"/>
               </a:spcAft>
-              <a:defRPr sz="1800">
+              <a:defRPr sz="1100">
                 <a:solidFill>
                   <a:srgbClr val="0D006A"/>
                 </a:solidFill>
@@ -10444,9 +10444,9 @@
           <a:p>
             <a:pPr>
               <a:spcAft>
-                <a:spcPts val="700"/>
+                <a:spcPts val="300"/>
               </a:spcAft>
-              <a:defRPr sz="1800">
+              <a:defRPr sz="1100">
                 <a:solidFill>
                   <a:srgbClr val="0D006A"/>
                 </a:solidFill>
@@ -10460,9 +10460,9 @@
           <a:p>
             <a:pPr>
               <a:spcAft>
-                <a:spcPts val="700"/>
+                <a:spcPts val="300"/>
               </a:spcAft>
-              <a:defRPr sz="1800">
+              <a:defRPr sz="1100">
                 <a:solidFill>
                   <a:srgbClr val="0D006A"/>
                 </a:solidFill>
@@ -10483,8 +10483,8 @@
         </p:nvSpPr>
         <p:spPr>
           <a:xfrm>
-            <a:off x="2520000" y="737999"/>
-            <a:ext cx="1800000" cy="1530000"/>
+            <a:off x="2484000" y="522000"/>
+            <a:ext cx="1962000" cy="1800000"/>
           </a:xfrm>
           <a:prstGeom prst="rect">
             <a:avLst/>
@@ -10499,9 +10499,9 @@
           <a:p>
             <a:pPr>
               <a:spcAft>
-                <a:spcPts val="700"/>
+                <a:spcPts val="300"/>
               </a:spcAft>
-              <a:defRPr sz="1800">
+              <a:defRPr sz="1100">
                 <a:solidFill>
                   <a:srgbClr val="0D006A"/>
                 </a:solidFill>
@@ -10515,9 +10515,9 @@
           <a:p>
             <a:pPr>
               <a:spcAft>
-                <a:spcPts val="700"/>
+                <a:spcPts val="300"/>
               </a:spcAft>
-              <a:defRPr sz="1800">
+              <a:defRPr sz="1100">
                 <a:solidFill>
                   <a:srgbClr val="0D006A"/>
                 </a:solidFill>
@@ -10538,7 +10538,7 @@
         </p:nvSpPr>
         <p:spPr>
           <a:xfrm>
-            <a:off x="0" y="2466000"/>
+            <a:off x="0" y="2538000"/>
             <a:ext cx="4799880" cy="18000"/>
           </a:xfrm>
           <a:prstGeom prst="rect">
@@ -10591,8 +10591,8 @@
         </p:blipFill>
         <p:spPr>
           <a:xfrm>
-            <a:off x="198000" y="2527200"/>
-            <a:ext cx="100543" cy="100800"/>
+            <a:off x="198000" y="2577600"/>
+            <a:ext cx="64635" cy="64800"/>
           </a:xfrm>
           <a:prstGeom prst="rect">
             <a:avLst/>
@@ -10607,8 +10607,8 @@
         </p:nvSpPr>
         <p:spPr>
           <a:xfrm>
-            <a:off x="3791880" y="2512800"/>
-            <a:ext cx="810000" cy="108000"/>
+            <a:off x="3791880" y="2566800"/>
+            <a:ext cx="810000" cy="79200"/>
           </a:xfrm>
           <a:prstGeom prst="rect">
             <a:avLst/>
@@ -10622,7 +10622,7 @@
           <a:lstStyle/>
           <a:p>
             <a:pPr algn="r">
-              <a:defRPr sz="800" b="0">
+              <a:defRPr sz="600" b="0">
                 <a:solidFill>
                   <a:srgbClr val="0D006A"/>
                 </a:solidFill>
@@ -10669,8 +10669,8 @@
         </p:nvSpPr>
         <p:spPr>
           <a:xfrm>
-            <a:off x="306000" y="198000"/>
-            <a:ext cx="4068000" cy="306000"/>
+            <a:off x="306000" y="151200"/>
+            <a:ext cx="4140000" cy="187200"/>
           </a:xfrm>
           <a:prstGeom prst="rect">
             <a:avLst/>
@@ -10684,7 +10684,7 @@
           <a:lstStyle/>
           <a:p>
             <a:pPr>
-              <a:defRPr sz="3300" b="1">
+              <a:defRPr sz="1800" b="1">
                 <a:solidFill>
                   <a:srgbClr val="0D006A"/>
                 </a:solidFill>
@@ -10705,8 +10705,8 @@
         </p:nvSpPr>
         <p:spPr>
           <a:xfrm>
-            <a:off x="306000" y="514800"/>
-            <a:ext cx="450000" cy="28800"/>
+            <a:off x="306000" y="367200"/>
+            <a:ext cx="378000" cy="18000"/>
           </a:xfrm>
           <a:prstGeom prst="rect">
             <a:avLst/>
@@ -10750,8 +10750,8 @@
         </p:nvSpPr>
         <p:spPr>
           <a:xfrm>
-            <a:off x="378000" y="630000"/>
-            <a:ext cx="208800" cy="208800"/>
+            <a:off x="360000" y="486000"/>
+            <a:ext cx="151200" cy="151200"/>
           </a:xfrm>
           <a:prstGeom prst="rect">
             <a:avLst/>
@@ -10795,8 +10795,8 @@
         </p:nvSpPr>
         <p:spPr>
           <a:xfrm>
-            <a:off x="378000" y="648000"/>
-            <a:ext cx="208800" cy="125999"/>
+            <a:off x="360000" y="496800"/>
+            <a:ext cx="151200" cy="90000"/>
           </a:xfrm>
           <a:prstGeom prst="rect">
             <a:avLst/>
@@ -10810,7 +10810,7 @@
           <a:lstStyle/>
           <a:p>
             <a:pPr algn="ctr">
-              <a:defRPr sz="1200" b="1">
+              <a:defRPr sz="700" b="1">
                 <a:solidFill>
                   <a:srgbClr val="F2F2F2"/>
                 </a:solidFill>
@@ -10831,8 +10831,8 @@
         </p:nvSpPr>
         <p:spPr>
           <a:xfrm>
-            <a:off x="684000" y="622800"/>
-            <a:ext cx="3671999" cy="223200"/>
+            <a:off x="612000" y="478800"/>
+            <a:ext cx="3851999" cy="151200"/>
           </a:xfrm>
           <a:prstGeom prst="rect">
             <a:avLst/>
@@ -10846,7 +10846,7 @@
           <a:lstStyle/>
           <a:p>
             <a:pPr>
-              <a:defRPr sz="1500" b="0">
+              <a:defRPr sz="1000" b="0">
                 <a:solidFill>
                   <a:srgbClr val="0D006A"/>
                 </a:solidFill>
@@ -10867,8 +10867,8 @@
         </p:nvSpPr>
         <p:spPr>
           <a:xfrm>
-            <a:off x="378000" y="889199"/>
-            <a:ext cx="208800" cy="208800"/>
+            <a:off x="360000" y="694800"/>
+            <a:ext cx="151200" cy="151200"/>
           </a:xfrm>
           <a:prstGeom prst="rect">
             <a:avLst/>
@@ -10912,8 +10912,8 @@
         </p:nvSpPr>
         <p:spPr>
           <a:xfrm>
-            <a:off x="378000" y="907199"/>
-            <a:ext cx="208800" cy="125999"/>
+            <a:off x="360000" y="705600"/>
+            <a:ext cx="151200" cy="90000"/>
           </a:xfrm>
           <a:prstGeom prst="rect">
             <a:avLst/>
@@ -10927,7 +10927,7 @@
           <a:lstStyle/>
           <a:p>
             <a:pPr algn="ctr">
-              <a:defRPr sz="1200" b="1">
+              <a:defRPr sz="700" b="1">
                 <a:solidFill>
                   <a:srgbClr val="F2F2F2"/>
                 </a:solidFill>
@@ -10948,8 +10948,8 @@
         </p:nvSpPr>
         <p:spPr>
           <a:xfrm>
-            <a:off x="684000" y="881999"/>
-            <a:ext cx="3671999" cy="223200"/>
+            <a:off x="612000" y="687600"/>
+            <a:ext cx="3851999" cy="151200"/>
           </a:xfrm>
           <a:prstGeom prst="rect">
             <a:avLst/>
@@ -10963,7 +10963,7 @@
           <a:lstStyle/>
           <a:p>
             <a:pPr>
-              <a:defRPr sz="1500" b="0">
+              <a:defRPr sz="1000" b="0">
                 <a:solidFill>
                   <a:srgbClr val="0D006A"/>
                 </a:solidFill>
@@ -10984,8 +10984,8 @@
         </p:nvSpPr>
         <p:spPr>
           <a:xfrm>
-            <a:off x="378000" y="1148399"/>
-            <a:ext cx="208800" cy="208800"/>
+            <a:off x="360000" y="903600"/>
+            <a:ext cx="151200" cy="151200"/>
           </a:xfrm>
           <a:prstGeom prst="rect">
             <a:avLst/>
@@ -11029,8 +11029,8 @@
         </p:nvSpPr>
         <p:spPr>
           <a:xfrm>
-            <a:off x="378000" y="1166399"/>
-            <a:ext cx="208800" cy="125999"/>
+            <a:off x="360000" y="914400"/>
+            <a:ext cx="151200" cy="90000"/>
           </a:xfrm>
           <a:prstGeom prst="rect">
             <a:avLst/>
@@ -11044,7 +11044,7 @@
           <a:lstStyle/>
           <a:p>
             <a:pPr algn="ctr">
-              <a:defRPr sz="1200" b="1">
+              <a:defRPr sz="700" b="1">
                 <a:solidFill>
                   <a:srgbClr val="F2F2F2"/>
                 </a:solidFill>
@@ -11065,8 +11065,8 @@
         </p:nvSpPr>
         <p:spPr>
           <a:xfrm>
-            <a:off x="684000" y="1141199"/>
-            <a:ext cx="3671999" cy="223200"/>
+            <a:off x="612000" y="896400"/>
+            <a:ext cx="3851999" cy="151200"/>
           </a:xfrm>
           <a:prstGeom prst="rect">
             <a:avLst/>
@@ -11080,7 +11080,7 @@
           <a:lstStyle/>
           <a:p>
             <a:pPr>
-              <a:defRPr sz="1500" b="0">
+              <a:defRPr sz="1000" b="0">
                 <a:solidFill>
                   <a:srgbClr val="0D006A"/>
                 </a:solidFill>
@@ -11101,8 +11101,8 @@
         </p:nvSpPr>
         <p:spPr>
           <a:xfrm>
-            <a:off x="378000" y="1407599"/>
-            <a:ext cx="208800" cy="208800"/>
+            <a:off x="360000" y="1112400"/>
+            <a:ext cx="151200" cy="151200"/>
           </a:xfrm>
           <a:prstGeom prst="rect">
             <a:avLst/>
@@ -11146,8 +11146,8 @@
         </p:nvSpPr>
         <p:spPr>
           <a:xfrm>
-            <a:off x="378000" y="1425599"/>
-            <a:ext cx="208800" cy="125999"/>
+            <a:off x="360000" y="1123200"/>
+            <a:ext cx="151200" cy="90000"/>
           </a:xfrm>
           <a:prstGeom prst="rect">
             <a:avLst/>
@@ -11161,7 +11161,7 @@
           <a:lstStyle/>
           <a:p>
             <a:pPr algn="ctr">
-              <a:defRPr sz="1200" b="1">
+              <a:defRPr sz="700" b="1">
                 <a:solidFill>
                   <a:srgbClr val="F2F2F2"/>
                 </a:solidFill>
@@ -11182,8 +11182,8 @@
         </p:nvSpPr>
         <p:spPr>
           <a:xfrm>
-            <a:off x="684000" y="1400399"/>
-            <a:ext cx="3671999" cy="223200"/>
+            <a:off x="612000" y="1105200"/>
+            <a:ext cx="3851999" cy="151200"/>
           </a:xfrm>
           <a:prstGeom prst="rect">
             <a:avLst/>
@@ -11197,7 +11197,7 @@
           <a:lstStyle/>
           <a:p>
             <a:pPr>
-              <a:defRPr sz="1500" b="0">
+              <a:defRPr sz="1000" b="0">
                 <a:solidFill>
                   <a:srgbClr val="0D006A"/>
                 </a:solidFill>
@@ -11218,8 +11218,8 @@
         </p:nvSpPr>
         <p:spPr>
           <a:xfrm>
-            <a:off x="378000" y="1666799"/>
-            <a:ext cx="208800" cy="208800"/>
+            <a:off x="360000" y="1321200"/>
+            <a:ext cx="151200" cy="151200"/>
           </a:xfrm>
           <a:prstGeom prst="rect">
             <a:avLst/>
@@ -11263,8 +11263,8 @@
         </p:nvSpPr>
         <p:spPr>
           <a:xfrm>
-            <a:off x="378000" y="1684799"/>
-            <a:ext cx="208800" cy="125999"/>
+            <a:off x="360000" y="1332000"/>
+            <a:ext cx="151200" cy="90000"/>
           </a:xfrm>
           <a:prstGeom prst="rect">
             <a:avLst/>
@@ -11278,7 +11278,7 @@
           <a:lstStyle/>
           <a:p>
             <a:pPr algn="ctr">
-              <a:defRPr sz="1200" b="1">
+              <a:defRPr sz="700" b="1">
                 <a:solidFill>
                   <a:srgbClr val="F2F2F2"/>
                 </a:solidFill>
@@ -11299,8 +11299,8 @@
         </p:nvSpPr>
         <p:spPr>
           <a:xfrm>
-            <a:off x="684000" y="1659599"/>
-            <a:ext cx="3671999" cy="223200"/>
+            <a:off x="612000" y="1314000"/>
+            <a:ext cx="3851999" cy="151200"/>
           </a:xfrm>
           <a:prstGeom prst="rect">
             <a:avLst/>
@@ -11314,7 +11314,7 @@
           <a:lstStyle/>
           <a:p>
             <a:pPr>
-              <a:defRPr sz="1500" b="0">
+              <a:defRPr sz="1000" b="0">
                 <a:solidFill>
                   <a:srgbClr val="0D006A"/>
                 </a:solidFill>
@@ -11335,7 +11335,7 @@
         </p:nvSpPr>
         <p:spPr>
           <a:xfrm>
-            <a:off x="0" y="2466000"/>
+            <a:off x="0" y="2538000"/>
             <a:ext cx="4799880" cy="18000"/>
           </a:xfrm>
           <a:prstGeom prst="rect">
@@ -11388,8 +11388,8 @@
         </p:blipFill>
         <p:spPr>
           <a:xfrm>
-            <a:off x="198000" y="2527200"/>
-            <a:ext cx="100543" cy="100800"/>
+            <a:off x="198000" y="2577600"/>
+            <a:ext cx="64635" cy="64800"/>
           </a:xfrm>
           <a:prstGeom prst="rect">
             <a:avLst/>
@@ -11404,8 +11404,8 @@
         </p:nvSpPr>
         <p:spPr>
           <a:xfrm>
-            <a:off x="3791880" y="2512800"/>
-            <a:ext cx="810000" cy="108000"/>
+            <a:off x="3791880" y="2566800"/>
+            <a:ext cx="810000" cy="79200"/>
           </a:xfrm>
           <a:prstGeom prst="rect">
             <a:avLst/>
@@ -11419,7 +11419,7 @@
           <a:lstStyle/>
           <a:p>
             <a:pPr algn="r">
-              <a:defRPr sz="800" b="0">
+              <a:defRPr sz="600" b="0">
                 <a:solidFill>
                   <a:srgbClr val="0D006A"/>
                 </a:solidFill>
@@ -11466,8 +11466,8 @@
         </p:nvSpPr>
         <p:spPr>
           <a:xfrm>
-            <a:off x="306000" y="198000"/>
-            <a:ext cx="4068000" cy="306000"/>
+            <a:off x="306000" y="151200"/>
+            <a:ext cx="4140000" cy="187200"/>
           </a:xfrm>
           <a:prstGeom prst="rect">
             <a:avLst/>
@@ -11481,7 +11481,7 @@
           <a:lstStyle/>
           <a:p>
             <a:pPr>
-              <a:defRPr sz="3300" b="1">
+              <a:defRPr sz="1800" b="1">
                 <a:solidFill>
                   <a:srgbClr val="0D006A"/>
                 </a:solidFill>
@@ -11502,8 +11502,8 @@
         </p:nvSpPr>
         <p:spPr>
           <a:xfrm>
-            <a:off x="306000" y="514800"/>
-            <a:ext cx="450000" cy="28800"/>
+            <a:off x="306000" y="367200"/>
+            <a:ext cx="378000" cy="18000"/>
           </a:xfrm>
           <a:prstGeom prst="rect">
             <a:avLst/>
@@ -11547,8 +11547,8 @@
         </p:nvSpPr>
         <p:spPr>
           <a:xfrm>
-            <a:off x="378000" y="630000"/>
-            <a:ext cx="208800" cy="208800"/>
+            <a:off x="360000" y="486000"/>
+            <a:ext cx="151200" cy="151200"/>
           </a:xfrm>
           <a:prstGeom prst="rect">
             <a:avLst/>
@@ -11592,8 +11592,8 @@
         </p:nvSpPr>
         <p:spPr>
           <a:xfrm>
-            <a:off x="378000" y="648000"/>
-            <a:ext cx="208800" cy="125999"/>
+            <a:off x="360000" y="496800"/>
+            <a:ext cx="151200" cy="90000"/>
           </a:xfrm>
           <a:prstGeom prst="rect">
             <a:avLst/>
@@ -11607,7 +11607,7 @@
           <a:lstStyle/>
           <a:p>
             <a:pPr algn="ctr">
-              <a:defRPr sz="1200" b="1">
+              <a:defRPr sz="700" b="1">
                 <a:solidFill>
                   <a:srgbClr val="F2F2F2"/>
                 </a:solidFill>
@@ -11628,8 +11628,8 @@
         </p:nvSpPr>
         <p:spPr>
           <a:xfrm>
-            <a:off x="684000" y="622800"/>
-            <a:ext cx="3671999" cy="223200"/>
+            <a:off x="612000" y="478800"/>
+            <a:ext cx="3851999" cy="151200"/>
           </a:xfrm>
           <a:prstGeom prst="rect">
             <a:avLst/>
@@ -11643,7 +11643,7 @@
           <a:lstStyle/>
           <a:p>
             <a:pPr>
-              <a:defRPr sz="1500" b="0">
+              <a:defRPr sz="1000" b="0">
                 <a:solidFill>
                   <a:srgbClr val="0D006A"/>
                 </a:solidFill>
@@ -11664,8 +11664,8 @@
         </p:nvSpPr>
         <p:spPr>
           <a:xfrm>
-            <a:off x="378000" y="889199"/>
-            <a:ext cx="208800" cy="208800"/>
+            <a:off x="360000" y="694800"/>
+            <a:ext cx="151200" cy="151200"/>
           </a:xfrm>
           <a:prstGeom prst="rect">
             <a:avLst/>
@@ -11709,8 +11709,8 @@
         </p:nvSpPr>
         <p:spPr>
           <a:xfrm>
-            <a:off x="378000" y="907199"/>
-            <a:ext cx="208800" cy="125999"/>
+            <a:off x="360000" y="705600"/>
+            <a:ext cx="151200" cy="90000"/>
           </a:xfrm>
           <a:prstGeom prst="rect">
             <a:avLst/>
@@ -11724,7 +11724,7 @@
           <a:lstStyle/>
           <a:p>
             <a:pPr algn="ctr">
-              <a:defRPr sz="1200" b="1">
+              <a:defRPr sz="700" b="1">
                 <a:solidFill>
                   <a:srgbClr val="F2F2F2"/>
                 </a:solidFill>
@@ -11745,8 +11745,8 @@
         </p:nvSpPr>
         <p:spPr>
           <a:xfrm>
-            <a:off x="684000" y="881999"/>
-            <a:ext cx="3671999" cy="223200"/>
+            <a:off x="612000" y="687600"/>
+            <a:ext cx="3851999" cy="151200"/>
           </a:xfrm>
           <a:prstGeom prst="rect">
             <a:avLst/>
@@ -11760,7 +11760,7 @@
           <a:lstStyle/>
           <a:p>
             <a:pPr>
-              <a:defRPr sz="1500" b="0">
+              <a:defRPr sz="1000" b="0">
                 <a:solidFill>
                   <a:srgbClr val="0D006A"/>
                 </a:solidFill>
@@ -11781,8 +11781,8 @@
         </p:nvSpPr>
         <p:spPr>
           <a:xfrm>
-            <a:off x="378000" y="1148399"/>
-            <a:ext cx="208800" cy="208800"/>
+            <a:off x="360000" y="903600"/>
+            <a:ext cx="151200" cy="151200"/>
           </a:xfrm>
           <a:prstGeom prst="rect">
             <a:avLst/>
@@ -11826,8 +11826,8 @@
         </p:nvSpPr>
         <p:spPr>
           <a:xfrm>
-            <a:off x="378000" y="1166399"/>
-            <a:ext cx="208800" cy="125999"/>
+            <a:off x="360000" y="914400"/>
+            <a:ext cx="151200" cy="90000"/>
           </a:xfrm>
           <a:prstGeom prst="rect">
             <a:avLst/>
@@ -11841,7 +11841,7 @@
           <a:lstStyle/>
           <a:p>
             <a:pPr algn="ctr">
-              <a:defRPr sz="1200" b="1">
+              <a:defRPr sz="700" b="1">
                 <a:solidFill>
                   <a:srgbClr val="F2F2F2"/>
                 </a:solidFill>
@@ -11862,8 +11862,8 @@
         </p:nvSpPr>
         <p:spPr>
           <a:xfrm>
-            <a:off x="684000" y="1141199"/>
-            <a:ext cx="3671999" cy="223200"/>
+            <a:off x="612000" y="896400"/>
+            <a:ext cx="3851999" cy="151200"/>
           </a:xfrm>
           <a:prstGeom prst="rect">
             <a:avLst/>
@@ -11877,7 +11877,7 @@
           <a:lstStyle/>
           <a:p>
             <a:pPr>
-              <a:defRPr sz="1500" b="0">
+              <a:defRPr sz="1000" b="0">
                 <a:solidFill>
                   <a:srgbClr val="0D006A"/>
                 </a:solidFill>
@@ -11898,8 +11898,8 @@
         </p:nvSpPr>
         <p:spPr>
           <a:xfrm>
-            <a:off x="378000" y="1407599"/>
-            <a:ext cx="208800" cy="208800"/>
+            <a:off x="360000" y="1112400"/>
+            <a:ext cx="151200" cy="151200"/>
           </a:xfrm>
           <a:prstGeom prst="rect">
             <a:avLst/>
@@ -11943,8 +11943,8 @@
         </p:nvSpPr>
         <p:spPr>
           <a:xfrm>
-            <a:off x="378000" y="1425599"/>
-            <a:ext cx="208800" cy="125999"/>
+            <a:off x="360000" y="1123200"/>
+            <a:ext cx="151200" cy="90000"/>
           </a:xfrm>
           <a:prstGeom prst="rect">
             <a:avLst/>
@@ -11958,7 +11958,7 @@
           <a:lstStyle/>
           <a:p>
             <a:pPr algn="ctr">
-              <a:defRPr sz="1200" b="1">
+              <a:defRPr sz="700" b="1">
                 <a:solidFill>
                   <a:srgbClr val="F2F2F2"/>
                 </a:solidFill>
@@ -11979,8 +11979,8 @@
         </p:nvSpPr>
         <p:spPr>
           <a:xfrm>
-            <a:off x="684000" y="1400399"/>
-            <a:ext cx="3671999" cy="223200"/>
+            <a:off x="612000" y="1105200"/>
+            <a:ext cx="3851999" cy="151200"/>
           </a:xfrm>
           <a:prstGeom prst="rect">
             <a:avLst/>
@@ -11994,7 +11994,7 @@
           <a:lstStyle/>
           <a:p>
             <a:pPr>
-              <a:defRPr sz="1500" b="0">
+              <a:defRPr sz="1000" b="0">
                 <a:solidFill>
                   <a:srgbClr val="0D006A"/>
                 </a:solidFill>
@@ -12015,8 +12015,8 @@
         </p:nvSpPr>
         <p:spPr>
           <a:xfrm>
-            <a:off x="378000" y="1666799"/>
-            <a:ext cx="208800" cy="208800"/>
+            <a:off x="360000" y="1321200"/>
+            <a:ext cx="151200" cy="151200"/>
           </a:xfrm>
           <a:prstGeom prst="rect">
             <a:avLst/>
@@ -12060,8 +12060,8 @@
         </p:nvSpPr>
         <p:spPr>
           <a:xfrm>
-            <a:off x="378000" y="1684799"/>
-            <a:ext cx="208800" cy="125999"/>
+            <a:off x="360000" y="1332000"/>
+            <a:ext cx="151200" cy="90000"/>
           </a:xfrm>
           <a:prstGeom prst="rect">
             <a:avLst/>
@@ -12075,7 +12075,7 @@
           <a:lstStyle/>
           <a:p>
             <a:pPr algn="ctr">
-              <a:defRPr sz="1200" b="1">
+              <a:defRPr sz="700" b="1">
                 <a:solidFill>
                   <a:srgbClr val="F2F2F2"/>
                 </a:solidFill>
@@ -12096,8 +12096,8 @@
         </p:nvSpPr>
         <p:spPr>
           <a:xfrm>
-            <a:off x="684000" y="1659599"/>
-            <a:ext cx="3671999" cy="223200"/>
+            <a:off x="612000" y="1314000"/>
+            <a:ext cx="3851999" cy="151200"/>
           </a:xfrm>
           <a:prstGeom prst="rect">
             <a:avLst/>
@@ -12111,7 +12111,7 @@
           <a:lstStyle/>
           <a:p>
             <a:pPr>
-              <a:defRPr sz="1500" b="0">
+              <a:defRPr sz="1000" b="0">
                 <a:solidFill>
                   <a:srgbClr val="0D006A"/>
                 </a:solidFill>
@@ -12132,7 +12132,7 @@
         </p:nvSpPr>
         <p:spPr>
           <a:xfrm>
-            <a:off x="0" y="2466000"/>
+            <a:off x="0" y="2538000"/>
             <a:ext cx="4799880" cy="18000"/>
           </a:xfrm>
           <a:prstGeom prst="rect">
@@ -12185,8 +12185,8 @@
         </p:blipFill>
         <p:spPr>
           <a:xfrm>
-            <a:off x="198000" y="2527200"/>
-            <a:ext cx="100543" cy="100800"/>
+            <a:off x="198000" y="2577600"/>
+            <a:ext cx="64635" cy="64800"/>
           </a:xfrm>
           <a:prstGeom prst="rect">
             <a:avLst/>
@@ -12201,8 +12201,8 @@
         </p:nvSpPr>
         <p:spPr>
           <a:xfrm>
-            <a:off x="3791880" y="2512800"/>
-            <a:ext cx="810000" cy="108000"/>
+            <a:off x="3791880" y="2566800"/>
+            <a:ext cx="810000" cy="79200"/>
           </a:xfrm>
           <a:prstGeom prst="rect">
             <a:avLst/>
@@ -12216,7 +12216,7 @@
           <a:lstStyle/>
           <a:p>
             <a:pPr algn="r">
-              <a:defRPr sz="800" b="0">
+              <a:defRPr sz="600" b="0">
                 <a:solidFill>
                   <a:srgbClr val="0D006A"/>
                 </a:solidFill>
@@ -12263,8 +12263,8 @@
         </p:nvSpPr>
         <p:spPr>
           <a:xfrm>
-            <a:off x="306000" y="198000"/>
-            <a:ext cx="4068000" cy="306000"/>
+            <a:off x="306000" y="151200"/>
+            <a:ext cx="4140000" cy="187200"/>
           </a:xfrm>
           <a:prstGeom prst="rect">
             <a:avLst/>
@@ -12278,7 +12278,7 @@
           <a:lstStyle/>
           <a:p>
             <a:pPr>
-              <a:defRPr sz="3300" b="1">
+              <a:defRPr sz="1800" b="1">
                 <a:solidFill>
                   <a:srgbClr val="0D006A"/>
                 </a:solidFill>
@@ -12299,8 +12299,8 @@
         </p:nvSpPr>
         <p:spPr>
           <a:xfrm>
-            <a:off x="306000" y="514800"/>
-            <a:ext cx="450000" cy="28800"/>
+            <a:off x="306000" y="367200"/>
+            <a:ext cx="378000" cy="18000"/>
           </a:xfrm>
           <a:prstGeom prst="rect">
             <a:avLst/>
@@ -12344,8 +12344,8 @@
         </p:nvSpPr>
         <p:spPr>
           <a:xfrm>
-            <a:off x="378000" y="630000"/>
-            <a:ext cx="208800" cy="208800"/>
+            <a:off x="360000" y="486000"/>
+            <a:ext cx="151200" cy="151200"/>
           </a:xfrm>
           <a:prstGeom prst="rect">
             <a:avLst/>
@@ -12389,8 +12389,8 @@
         </p:nvSpPr>
         <p:spPr>
           <a:xfrm>
-            <a:off x="378000" y="648000"/>
-            <a:ext cx="208800" cy="125999"/>
+            <a:off x="360000" y="496800"/>
+            <a:ext cx="151200" cy="90000"/>
           </a:xfrm>
           <a:prstGeom prst="rect">
             <a:avLst/>
@@ -12404,7 +12404,7 @@
           <a:lstStyle/>
           <a:p>
             <a:pPr algn="ctr">
-              <a:defRPr sz="1200" b="1">
+              <a:defRPr sz="700" b="1">
                 <a:solidFill>
                   <a:srgbClr val="F2F2F2"/>
                 </a:solidFill>
@@ -12425,8 +12425,8 @@
         </p:nvSpPr>
         <p:spPr>
           <a:xfrm>
-            <a:off x="684000" y="622800"/>
-            <a:ext cx="3671999" cy="223200"/>
+            <a:off x="612000" y="478800"/>
+            <a:ext cx="3851999" cy="151200"/>
           </a:xfrm>
           <a:prstGeom prst="rect">
             <a:avLst/>
@@ -12440,7 +12440,7 @@
           <a:lstStyle/>
           <a:p>
             <a:pPr>
-              <a:defRPr sz="1500" b="0">
+              <a:defRPr sz="1000" b="0">
                 <a:solidFill>
                   <a:srgbClr val="0D006A"/>
                 </a:solidFill>
@@ -12461,8 +12461,8 @@
         </p:nvSpPr>
         <p:spPr>
           <a:xfrm>
-            <a:off x="378000" y="889199"/>
-            <a:ext cx="208800" cy="208800"/>
+            <a:off x="360000" y="694800"/>
+            <a:ext cx="151200" cy="151200"/>
           </a:xfrm>
           <a:prstGeom prst="rect">
             <a:avLst/>
@@ -12506,8 +12506,8 @@
         </p:nvSpPr>
         <p:spPr>
           <a:xfrm>
-            <a:off x="378000" y="907199"/>
-            <a:ext cx="208800" cy="125999"/>
+            <a:off x="360000" y="705600"/>
+            <a:ext cx="151200" cy="90000"/>
           </a:xfrm>
           <a:prstGeom prst="rect">
             <a:avLst/>
@@ -12521,7 +12521,7 @@
           <a:lstStyle/>
           <a:p>
             <a:pPr algn="ctr">
-              <a:defRPr sz="1200" b="1">
+              <a:defRPr sz="700" b="1">
                 <a:solidFill>
                   <a:srgbClr val="F2F2F2"/>
                 </a:solidFill>
@@ -12542,8 +12542,8 @@
         </p:nvSpPr>
         <p:spPr>
           <a:xfrm>
-            <a:off x="684000" y="881999"/>
-            <a:ext cx="3671999" cy="223200"/>
+            <a:off x="612000" y="687600"/>
+            <a:ext cx="3851999" cy="151200"/>
           </a:xfrm>
           <a:prstGeom prst="rect">
             <a:avLst/>
@@ -12557,7 +12557,7 @@
           <a:lstStyle/>
           <a:p>
             <a:pPr>
-              <a:defRPr sz="1500" b="0">
+              <a:defRPr sz="1000" b="0">
                 <a:solidFill>
                   <a:srgbClr val="0D006A"/>
                 </a:solidFill>
@@ -12578,8 +12578,8 @@
         </p:nvSpPr>
         <p:spPr>
           <a:xfrm>
-            <a:off x="378000" y="1148399"/>
-            <a:ext cx="208800" cy="208800"/>
+            <a:off x="360000" y="903600"/>
+            <a:ext cx="151200" cy="151200"/>
           </a:xfrm>
           <a:prstGeom prst="rect">
             <a:avLst/>
@@ -12623,8 +12623,8 @@
         </p:nvSpPr>
         <p:spPr>
           <a:xfrm>
-            <a:off x="378000" y="1166399"/>
-            <a:ext cx="208800" cy="125999"/>
+            <a:off x="360000" y="914400"/>
+            <a:ext cx="151200" cy="90000"/>
           </a:xfrm>
           <a:prstGeom prst="rect">
             <a:avLst/>
@@ -12638,7 +12638,7 @@
           <a:lstStyle/>
           <a:p>
             <a:pPr algn="ctr">
-              <a:defRPr sz="1200" b="1">
+              <a:defRPr sz="700" b="1">
                 <a:solidFill>
                   <a:srgbClr val="F2F2F2"/>
                 </a:solidFill>
@@ -12659,8 +12659,8 @@
         </p:nvSpPr>
         <p:spPr>
           <a:xfrm>
-            <a:off x="684000" y="1141199"/>
-            <a:ext cx="3671999" cy="223200"/>
+            <a:off x="612000" y="896400"/>
+            <a:ext cx="3851999" cy="151200"/>
           </a:xfrm>
           <a:prstGeom prst="rect">
             <a:avLst/>
@@ -12674,7 +12674,7 @@
           <a:lstStyle/>
           <a:p>
             <a:pPr>
-              <a:defRPr sz="1500" b="0">
+              <a:defRPr sz="1000" b="0">
                 <a:solidFill>
                   <a:srgbClr val="0D006A"/>
                 </a:solidFill>
@@ -12695,8 +12695,8 @@
         </p:nvSpPr>
         <p:spPr>
           <a:xfrm>
-            <a:off x="378000" y="1407599"/>
-            <a:ext cx="208800" cy="208800"/>
+            <a:off x="360000" y="1112400"/>
+            <a:ext cx="151200" cy="151200"/>
           </a:xfrm>
           <a:prstGeom prst="rect">
             <a:avLst/>
@@ -12740,8 +12740,8 @@
         </p:nvSpPr>
         <p:spPr>
           <a:xfrm>
-            <a:off x="378000" y="1425599"/>
-            <a:ext cx="208800" cy="125999"/>
+            <a:off x="360000" y="1123200"/>
+            <a:ext cx="151200" cy="90000"/>
           </a:xfrm>
           <a:prstGeom prst="rect">
             <a:avLst/>
@@ -12755,7 +12755,7 @@
           <a:lstStyle/>
           <a:p>
             <a:pPr algn="ctr">
-              <a:defRPr sz="1200" b="1">
+              <a:defRPr sz="700" b="1">
                 <a:solidFill>
                   <a:srgbClr val="F2F2F2"/>
                 </a:solidFill>
@@ -12776,8 +12776,8 @@
         </p:nvSpPr>
         <p:spPr>
           <a:xfrm>
-            <a:off x="684000" y="1400399"/>
-            <a:ext cx="3671999" cy="223200"/>
+            <a:off x="612000" y="1105200"/>
+            <a:ext cx="3851999" cy="151200"/>
           </a:xfrm>
           <a:prstGeom prst="rect">
             <a:avLst/>
@@ -12791,7 +12791,7 @@
           <a:lstStyle/>
           <a:p>
             <a:pPr>
-              <a:defRPr sz="1500" b="0">
+              <a:defRPr sz="1000" b="0">
                 <a:solidFill>
                   <a:srgbClr val="0D006A"/>
                 </a:solidFill>
@@ -12812,8 +12812,8 @@
         </p:nvSpPr>
         <p:spPr>
           <a:xfrm>
-            <a:off x="378000" y="1666799"/>
-            <a:ext cx="208800" cy="208800"/>
+            <a:off x="360000" y="1321200"/>
+            <a:ext cx="151200" cy="151200"/>
           </a:xfrm>
           <a:prstGeom prst="rect">
             <a:avLst/>
@@ -12857,8 +12857,8 @@
         </p:nvSpPr>
         <p:spPr>
           <a:xfrm>
-            <a:off x="378000" y="1684799"/>
-            <a:ext cx="208800" cy="125999"/>
+            <a:off x="360000" y="1332000"/>
+            <a:ext cx="151200" cy="90000"/>
           </a:xfrm>
           <a:prstGeom prst="rect">
             <a:avLst/>
@@ -12872,7 +12872,7 @@
           <a:lstStyle/>
           <a:p>
             <a:pPr algn="ctr">
-              <a:defRPr sz="1200" b="1">
+              <a:defRPr sz="700" b="1">
                 <a:solidFill>
                   <a:srgbClr val="F2F2F2"/>
                 </a:solidFill>
@@ -12893,8 +12893,8 @@
         </p:nvSpPr>
         <p:spPr>
           <a:xfrm>
-            <a:off x="684000" y="1659599"/>
-            <a:ext cx="3671999" cy="223200"/>
+            <a:off x="612000" y="1314000"/>
+            <a:ext cx="3851999" cy="151200"/>
           </a:xfrm>
           <a:prstGeom prst="rect">
             <a:avLst/>
@@ -12908,7 +12908,7 @@
           <a:lstStyle/>
           <a:p>
             <a:pPr>
-              <a:defRPr sz="1500" b="0">
+              <a:defRPr sz="1000" b="0">
                 <a:solidFill>
                   <a:srgbClr val="0D006A"/>
                 </a:solidFill>
@@ -12929,7 +12929,7 @@
         </p:nvSpPr>
         <p:spPr>
           <a:xfrm>
-            <a:off x="0" y="2466000"/>
+            <a:off x="0" y="2538000"/>
             <a:ext cx="4799880" cy="18000"/>
           </a:xfrm>
           <a:prstGeom prst="rect">
@@ -12982,8 +12982,8 @@
         </p:blipFill>
         <p:spPr>
           <a:xfrm>
-            <a:off x="198000" y="2527200"/>
-            <a:ext cx="100543" cy="100800"/>
+            <a:off x="198000" y="2577600"/>
+            <a:ext cx="64635" cy="64800"/>
           </a:xfrm>
           <a:prstGeom prst="rect">
             <a:avLst/>
@@ -12998,8 +12998,8 @@
         </p:nvSpPr>
         <p:spPr>
           <a:xfrm>
-            <a:off x="3791880" y="2512800"/>
-            <a:ext cx="810000" cy="108000"/>
+            <a:off x="3791880" y="2566800"/>
+            <a:ext cx="810000" cy="79200"/>
           </a:xfrm>
           <a:prstGeom prst="rect">
             <a:avLst/>
@@ -13013,7 +13013,7 @@
           <a:lstStyle/>
           <a:p>
             <a:pPr algn="r">
-              <a:defRPr sz="800" b="0">
+              <a:defRPr sz="600" b="0">
                 <a:solidFill>
                   <a:srgbClr val="0D006A"/>
                 </a:solidFill>
@@ -13060,8 +13060,8 @@
         </p:nvSpPr>
         <p:spPr>
           <a:xfrm>
-            <a:off x="306000" y="198000"/>
-            <a:ext cx="4068000" cy="306000"/>
+            <a:off x="306000" y="151200"/>
+            <a:ext cx="4140000" cy="187200"/>
           </a:xfrm>
           <a:prstGeom prst="rect">
             <a:avLst/>
@@ -13075,7 +13075,7 @@
           <a:lstStyle/>
           <a:p>
             <a:pPr>
-              <a:defRPr sz="3300" b="1">
+              <a:defRPr sz="1800" b="1">
                 <a:solidFill>
                   <a:srgbClr val="0D006A"/>
                 </a:solidFill>
@@ -13096,8 +13096,8 @@
         </p:nvSpPr>
         <p:spPr>
           <a:xfrm>
-            <a:off x="306000" y="514800"/>
-            <a:ext cx="450000" cy="28800"/>
+            <a:off x="306000" y="367200"/>
+            <a:ext cx="378000" cy="18000"/>
           </a:xfrm>
           <a:prstGeom prst="rect">
             <a:avLst/>
@@ -13141,8 +13141,8 @@
         </p:nvSpPr>
         <p:spPr>
           <a:xfrm>
-            <a:off x="378000" y="666000"/>
-            <a:ext cx="3924000" cy="1530000"/>
+            <a:off x="378000" y="486000"/>
+            <a:ext cx="3996000" cy="1745999"/>
           </a:xfrm>
           <a:prstGeom prst="rect">
             <a:avLst/>
@@ -13157,9 +13157,9 @@
           <a:p>
             <a:pPr>
               <a:spcAft>
-                <a:spcPts val="700"/>
+                <a:spcPts val="300"/>
               </a:spcAft>
-              <a:defRPr sz="1700">
+              <a:defRPr sz="1100">
                 <a:solidFill>
                   <a:srgbClr val="0D006A"/>
                 </a:solidFill>
@@ -13173,9 +13173,9 @@
           <a:p>
             <a:pPr>
               <a:spcAft>
-                <a:spcPts val="700"/>
+                <a:spcPts val="300"/>
               </a:spcAft>
-              <a:defRPr sz="1700">
+              <a:defRPr sz="1100">
                 <a:solidFill>
                   <a:srgbClr val="0D006A"/>
                 </a:solidFill>
@@ -13189,9 +13189,9 @@
           <a:p>
             <a:pPr>
               <a:spcAft>
-                <a:spcPts val="700"/>
+                <a:spcPts val="300"/>
               </a:spcAft>
-              <a:defRPr sz="1700">
+              <a:defRPr sz="1100">
                 <a:solidFill>
                   <a:srgbClr val="0D006A"/>
                 </a:solidFill>
@@ -13205,9 +13205,9 @@
           <a:p>
             <a:pPr>
               <a:spcAft>
-                <a:spcPts val="700"/>
+                <a:spcPts val="300"/>
               </a:spcAft>
-              <a:defRPr sz="1700">
+              <a:defRPr sz="1100">
                 <a:solidFill>
                   <a:srgbClr val="0D006A"/>
                 </a:solidFill>
@@ -13221,9 +13221,9 @@
           <a:p>
             <a:pPr>
               <a:spcAft>
-                <a:spcPts val="700"/>
+                <a:spcPts val="300"/>
               </a:spcAft>
-              <a:defRPr sz="1700">
+              <a:defRPr sz="1100">
                 <a:solidFill>
                   <a:srgbClr val="0D006A"/>
                 </a:solidFill>
@@ -13244,8 +13244,8 @@
         </p:nvSpPr>
         <p:spPr>
           <a:xfrm>
-            <a:off x="306000" y="2232000"/>
-            <a:ext cx="4194000" cy="208800"/>
+            <a:off x="306000" y="2278800"/>
+            <a:ext cx="4194000" cy="136800"/>
           </a:xfrm>
           <a:prstGeom prst="rect">
             <a:avLst/>
@@ -13289,8 +13289,8 @@
         </p:nvSpPr>
         <p:spPr>
           <a:xfrm>
-            <a:off x="378000" y="2264400"/>
-            <a:ext cx="4031999" cy="115200"/>
+            <a:off x="360000" y="2296800"/>
+            <a:ext cx="4086000" cy="79200"/>
           </a:xfrm>
           <a:prstGeom prst="rect">
             <a:avLst/>
@@ -13304,7 +13304,7 @@
           <a:lstStyle/>
           <a:p>
             <a:pPr>
-              <a:defRPr sz="1100" b="1">
+              <a:defRPr sz="800" b="1">
                 <a:solidFill>
                   <a:srgbClr val="F2F2F2"/>
                 </a:solidFill>
@@ -13325,7 +13325,7 @@
         </p:nvSpPr>
         <p:spPr>
           <a:xfrm>
-            <a:off x="0" y="2466000"/>
+            <a:off x="0" y="2538000"/>
             <a:ext cx="4799880" cy="18000"/>
           </a:xfrm>
           <a:prstGeom prst="rect">
@@ -13378,8 +13378,8 @@
         </p:blipFill>
         <p:spPr>
           <a:xfrm>
-            <a:off x="198000" y="2527200"/>
-            <a:ext cx="100543" cy="100800"/>
+            <a:off x="198000" y="2577600"/>
+            <a:ext cx="64635" cy="64800"/>
           </a:xfrm>
           <a:prstGeom prst="rect">
             <a:avLst/>
@@ -13394,8 +13394,8 @@
         </p:nvSpPr>
         <p:spPr>
           <a:xfrm>
-            <a:off x="3791880" y="2512800"/>
-            <a:ext cx="810000" cy="108000"/>
+            <a:off x="3791880" y="2566800"/>
+            <a:ext cx="810000" cy="79200"/>
           </a:xfrm>
           <a:prstGeom prst="rect">
             <a:avLst/>
@@ -13409,7 +13409,7 @@
           <a:lstStyle/>
           <a:p>
             <a:pPr algn="r">
-              <a:defRPr sz="800" b="0">
+              <a:defRPr sz="600" b="0">
                 <a:solidFill>
                   <a:srgbClr val="0D006A"/>
                 </a:solidFill>
@@ -13456,8 +13456,8 @@
         </p:nvSpPr>
         <p:spPr>
           <a:xfrm>
-            <a:off x="306000" y="198000"/>
-            <a:ext cx="4068000" cy="306000"/>
+            <a:off x="306000" y="151200"/>
+            <a:ext cx="4140000" cy="187200"/>
           </a:xfrm>
           <a:prstGeom prst="rect">
             <a:avLst/>
@@ -13471,7 +13471,7 @@
           <a:lstStyle/>
           <a:p>
             <a:pPr>
-              <a:defRPr sz="3300" b="1">
+              <a:defRPr sz="1800" b="1">
                 <a:solidFill>
                   <a:srgbClr val="0D006A"/>
                 </a:solidFill>
@@ -13492,8 +13492,8 @@
         </p:nvSpPr>
         <p:spPr>
           <a:xfrm>
-            <a:off x="306000" y="514800"/>
-            <a:ext cx="450000" cy="28800"/>
+            <a:off x="306000" y="367200"/>
+            <a:ext cx="378000" cy="18000"/>
           </a:xfrm>
           <a:prstGeom prst="rect">
             <a:avLst/>
@@ -13537,8 +13537,8 @@
         </p:nvSpPr>
         <p:spPr>
           <a:xfrm>
-            <a:off x="378000" y="666000"/>
-            <a:ext cx="3924000" cy="1530000"/>
+            <a:off x="378000" y="486000"/>
+            <a:ext cx="3996000" cy="1745999"/>
           </a:xfrm>
           <a:prstGeom prst="rect">
             <a:avLst/>
@@ -13553,9 +13553,9 @@
           <a:p>
             <a:pPr>
               <a:spcAft>
-                <a:spcPts val="700"/>
+                <a:spcPts val="300"/>
               </a:spcAft>
-              <a:defRPr sz="1700">
+              <a:defRPr sz="1100">
                 <a:solidFill>
                   <a:srgbClr val="0D006A"/>
                 </a:solidFill>
@@ -13569,9 +13569,9 @@
           <a:p>
             <a:pPr>
               <a:spcAft>
-                <a:spcPts val="700"/>
+                <a:spcPts val="300"/>
               </a:spcAft>
-              <a:defRPr sz="1700">
+              <a:defRPr sz="1100">
                 <a:solidFill>
                   <a:srgbClr val="0D006A"/>
                 </a:solidFill>
@@ -13585,9 +13585,9 @@
           <a:p>
             <a:pPr>
               <a:spcAft>
-                <a:spcPts val="700"/>
+                <a:spcPts val="300"/>
               </a:spcAft>
-              <a:defRPr sz="1700">
+              <a:defRPr sz="1100">
                 <a:solidFill>
                   <a:srgbClr val="0D006A"/>
                 </a:solidFill>
@@ -13601,9 +13601,9 @@
           <a:p>
             <a:pPr>
               <a:spcAft>
-                <a:spcPts val="700"/>
+                <a:spcPts val="300"/>
               </a:spcAft>
-              <a:defRPr sz="1700">
+              <a:defRPr sz="1100">
                 <a:solidFill>
                   <a:srgbClr val="0D006A"/>
                 </a:solidFill>
@@ -13617,9 +13617,9 @@
           <a:p>
             <a:pPr>
               <a:spcAft>
-                <a:spcPts val="700"/>
+                <a:spcPts val="300"/>
               </a:spcAft>
-              <a:defRPr sz="1700">
+              <a:defRPr sz="1100">
                 <a:solidFill>
                   <a:srgbClr val="0D006A"/>
                 </a:solidFill>
@@ -13640,8 +13640,8 @@
         </p:nvSpPr>
         <p:spPr>
           <a:xfrm>
-            <a:off x="306000" y="2232000"/>
-            <a:ext cx="4194000" cy="208800"/>
+            <a:off x="306000" y="2278800"/>
+            <a:ext cx="4194000" cy="136800"/>
           </a:xfrm>
           <a:prstGeom prst="rect">
             <a:avLst/>
@@ -13685,8 +13685,8 @@
         </p:nvSpPr>
         <p:spPr>
           <a:xfrm>
-            <a:off x="378000" y="2264400"/>
-            <a:ext cx="4031999" cy="115200"/>
+            <a:off x="360000" y="2296800"/>
+            <a:ext cx="4086000" cy="79200"/>
           </a:xfrm>
           <a:prstGeom prst="rect">
             <a:avLst/>
@@ -13700,7 +13700,7 @@
           <a:lstStyle/>
           <a:p>
             <a:pPr>
-              <a:defRPr sz="1100" b="1">
+              <a:defRPr sz="800" b="1">
                 <a:solidFill>
                   <a:srgbClr val="F2F2F2"/>
                 </a:solidFill>
@@ -13721,7 +13721,7 @@
         </p:nvSpPr>
         <p:spPr>
           <a:xfrm>
-            <a:off x="0" y="2466000"/>
+            <a:off x="0" y="2538000"/>
             <a:ext cx="4799880" cy="18000"/>
           </a:xfrm>
           <a:prstGeom prst="rect">
@@ -13774,8 +13774,8 @@
         </p:blipFill>
         <p:spPr>
           <a:xfrm>
-            <a:off x="198000" y="2527200"/>
-            <a:ext cx="100543" cy="100800"/>
+            <a:off x="198000" y="2577600"/>
+            <a:ext cx="64635" cy="64800"/>
           </a:xfrm>
           <a:prstGeom prst="rect">
             <a:avLst/>
@@ -13790,8 +13790,8 @@
         </p:nvSpPr>
         <p:spPr>
           <a:xfrm>
-            <a:off x="3791880" y="2512800"/>
-            <a:ext cx="810000" cy="108000"/>
+            <a:off x="3791880" y="2566800"/>
+            <a:ext cx="810000" cy="79200"/>
           </a:xfrm>
           <a:prstGeom prst="rect">
             <a:avLst/>
@@ -13805,7 +13805,7 @@
           <a:lstStyle/>
           <a:p>
             <a:pPr algn="r">
-              <a:defRPr sz="800" b="0">
+              <a:defRPr sz="600" b="0">
                 <a:solidFill>
                   <a:srgbClr val="0D006A"/>
                 </a:solidFill>
@@ -13852,8 +13852,8 @@
         </p:nvSpPr>
         <p:spPr>
           <a:xfrm>
-            <a:off x="306000" y="198000"/>
-            <a:ext cx="4068000" cy="306000"/>
+            <a:off x="306000" y="151200"/>
+            <a:ext cx="4140000" cy="187200"/>
           </a:xfrm>
           <a:prstGeom prst="rect">
             <a:avLst/>
@@ -13867,7 +13867,7 @@
           <a:lstStyle/>
           <a:p>
             <a:pPr>
-              <a:defRPr sz="3300" b="1">
+              <a:defRPr sz="1800" b="1">
                 <a:solidFill>
                   <a:srgbClr val="0D006A"/>
                 </a:solidFill>
@@ -13888,8 +13888,8 @@
         </p:nvSpPr>
         <p:spPr>
           <a:xfrm>
-            <a:off x="306000" y="514800"/>
-            <a:ext cx="450000" cy="28800"/>
+            <a:off x="306000" y="367200"/>
+            <a:ext cx="378000" cy="18000"/>
           </a:xfrm>
           <a:prstGeom prst="rect">
             <a:avLst/>
@@ -13933,8 +13933,8 @@
         </p:nvSpPr>
         <p:spPr>
           <a:xfrm>
-            <a:off x="378000" y="666000"/>
-            <a:ext cx="3924000" cy="1530000"/>
+            <a:off x="378000" y="486000"/>
+            <a:ext cx="3996000" cy="1745999"/>
           </a:xfrm>
           <a:prstGeom prst="rect">
             <a:avLst/>
@@ -13949,9 +13949,9 @@
           <a:p>
             <a:pPr>
               <a:spcAft>
-                <a:spcPts val="700"/>
+                <a:spcPts val="300"/>
               </a:spcAft>
-              <a:defRPr sz="1700">
+              <a:defRPr sz="1100">
                 <a:solidFill>
                   <a:srgbClr val="0D006A"/>
                 </a:solidFill>
@@ -13965,9 +13965,9 @@
           <a:p>
             <a:pPr>
               <a:spcAft>
-                <a:spcPts val="700"/>
+                <a:spcPts val="300"/>
               </a:spcAft>
-              <a:defRPr sz="1700">
+              <a:defRPr sz="1100">
                 <a:solidFill>
                   <a:srgbClr val="0D006A"/>
                 </a:solidFill>
@@ -13981,9 +13981,9 @@
           <a:p>
             <a:pPr>
               <a:spcAft>
-                <a:spcPts val="700"/>
+                <a:spcPts val="300"/>
               </a:spcAft>
-              <a:defRPr sz="1700">
+              <a:defRPr sz="1100">
                 <a:solidFill>
                   <a:srgbClr val="0D006A"/>
                 </a:solidFill>
@@ -13997,9 +13997,9 @@
           <a:p>
             <a:pPr>
               <a:spcAft>
-                <a:spcPts val="700"/>
+                <a:spcPts val="300"/>
               </a:spcAft>
-              <a:defRPr sz="1700">
+              <a:defRPr sz="1100">
                 <a:solidFill>
                   <a:srgbClr val="0D006A"/>
                 </a:solidFill>
@@ -14013,9 +14013,9 @@
           <a:p>
             <a:pPr>
               <a:spcAft>
-                <a:spcPts val="700"/>
+                <a:spcPts val="300"/>
               </a:spcAft>
-              <a:defRPr sz="1700">
+              <a:defRPr sz="1100">
                 <a:solidFill>
                   <a:srgbClr val="0D006A"/>
                 </a:solidFill>
@@ -14036,8 +14036,8 @@
         </p:nvSpPr>
         <p:spPr>
           <a:xfrm>
-            <a:off x="306000" y="2232000"/>
-            <a:ext cx="4194000" cy="208800"/>
+            <a:off x="306000" y="2278800"/>
+            <a:ext cx="4194000" cy="136800"/>
           </a:xfrm>
           <a:prstGeom prst="rect">
             <a:avLst/>
@@ -14081,8 +14081,8 @@
         </p:nvSpPr>
         <p:spPr>
           <a:xfrm>
-            <a:off x="378000" y="2264400"/>
-            <a:ext cx="4031999" cy="115200"/>
+            <a:off x="360000" y="2296800"/>
+            <a:ext cx="4086000" cy="79200"/>
           </a:xfrm>
           <a:prstGeom prst="rect">
             <a:avLst/>
@@ -14096,7 +14096,7 @@
           <a:lstStyle/>
           <a:p>
             <a:pPr>
-              <a:defRPr sz="1100" b="1">
+              <a:defRPr sz="800" b="1">
                 <a:solidFill>
                   <a:srgbClr val="F2F2F2"/>
                 </a:solidFill>
@@ -14117,7 +14117,7 @@
         </p:nvSpPr>
         <p:spPr>
           <a:xfrm>
-            <a:off x="0" y="2466000"/>
+            <a:off x="0" y="2538000"/>
             <a:ext cx="4799880" cy="18000"/>
           </a:xfrm>
           <a:prstGeom prst="rect">
@@ -14170,8 +14170,8 @@
         </p:blipFill>
         <p:spPr>
           <a:xfrm>
-            <a:off x="198000" y="2527200"/>
-            <a:ext cx="100543" cy="100800"/>
+            <a:off x="198000" y="2577600"/>
+            <a:ext cx="64635" cy="64800"/>
           </a:xfrm>
           <a:prstGeom prst="rect">
             <a:avLst/>
@@ -14186,8 +14186,8 @@
         </p:nvSpPr>
         <p:spPr>
           <a:xfrm>
-            <a:off x="3791880" y="2512800"/>
-            <a:ext cx="810000" cy="108000"/>
+            <a:off x="3791880" y="2566800"/>
+            <a:ext cx="810000" cy="79200"/>
           </a:xfrm>
           <a:prstGeom prst="rect">
             <a:avLst/>
@@ -14201,7 +14201,7 @@
           <a:lstStyle/>
           <a:p>
             <a:pPr algn="r">
-              <a:defRPr sz="800" b="0">
+              <a:defRPr sz="600" b="0">
                 <a:solidFill>
                   <a:srgbClr val="0D006A"/>
                 </a:solidFill>
@@ -14248,8 +14248,8 @@
         </p:nvSpPr>
         <p:spPr>
           <a:xfrm>
-            <a:off x="306000" y="198000"/>
-            <a:ext cx="4068000" cy="306000"/>
+            <a:off x="306000" y="151200"/>
+            <a:ext cx="4140000" cy="187200"/>
           </a:xfrm>
           <a:prstGeom prst="rect">
             <a:avLst/>
@@ -14263,7 +14263,7 @@
           <a:lstStyle/>
           <a:p>
             <a:pPr>
-              <a:defRPr sz="3300" b="1">
+              <a:defRPr sz="1800" b="1">
                 <a:solidFill>
                   <a:srgbClr val="0D006A"/>
                 </a:solidFill>
@@ -14284,8 +14284,8 @@
         </p:nvSpPr>
         <p:spPr>
           <a:xfrm>
-            <a:off x="306000" y="514800"/>
-            <a:ext cx="450000" cy="28800"/>
+            <a:off x="306000" y="367200"/>
+            <a:ext cx="378000" cy="18000"/>
           </a:xfrm>
           <a:prstGeom prst="rect">
             <a:avLst/>
@@ -14329,8 +14329,8 @@
         </p:nvSpPr>
         <p:spPr>
           <a:xfrm>
-            <a:off x="396000" y="648000"/>
-            <a:ext cx="720000" cy="172800"/>
+            <a:off x="360000" y="486000"/>
+            <a:ext cx="666000" cy="129600"/>
           </a:xfrm>
           <a:prstGeom prst="rect">
             <a:avLst/>
@@ -14344,7 +14344,7 @@
           <a:lstStyle/>
           <a:p>
             <a:pPr>
-              <a:defRPr sz="1400" b="1">
+              <a:defRPr sz="900" b="1">
                 <a:solidFill>
                   <a:srgbClr val="3F0576"/>
                 </a:solidFill>
@@ -14365,8 +14365,8 @@
         </p:nvSpPr>
         <p:spPr>
           <a:xfrm>
-            <a:off x="1206000" y="648000"/>
-            <a:ext cx="3024000" cy="172800"/>
+            <a:off x="1098000" y="486000"/>
+            <a:ext cx="3240000" cy="129600"/>
           </a:xfrm>
           <a:prstGeom prst="rect">
             <a:avLst/>
@@ -14380,7 +14380,7 @@
           <a:lstStyle/>
           <a:p>
             <a:pPr>
-              <a:defRPr sz="1500" b="0">
+              <a:defRPr sz="1000" b="0">
                 <a:solidFill>
                   <a:srgbClr val="0D006A"/>
                 </a:solidFill>
@@ -14401,8 +14401,8 @@
         </p:nvSpPr>
         <p:spPr>
           <a:xfrm>
-            <a:off x="396000" y="878400"/>
-            <a:ext cx="720000" cy="172800"/>
+            <a:off x="360000" y="673200"/>
+            <a:ext cx="666000" cy="129600"/>
           </a:xfrm>
           <a:prstGeom prst="rect">
             <a:avLst/>
@@ -14416,7 +14416,7 @@
           <a:lstStyle/>
           <a:p>
             <a:pPr>
-              <a:defRPr sz="1400" b="1">
+              <a:defRPr sz="900" b="1">
                 <a:solidFill>
                   <a:srgbClr val="3F0576"/>
                 </a:solidFill>
@@ -14437,8 +14437,8 @@
         </p:nvSpPr>
         <p:spPr>
           <a:xfrm>
-            <a:off x="1206000" y="878400"/>
-            <a:ext cx="3024000" cy="172800"/>
+            <a:off x="1098000" y="673200"/>
+            <a:ext cx="3240000" cy="129600"/>
           </a:xfrm>
           <a:prstGeom prst="rect">
             <a:avLst/>
@@ -14452,7 +14452,7 @@
           <a:lstStyle/>
           <a:p>
             <a:pPr>
-              <a:defRPr sz="1500" b="0">
+              <a:defRPr sz="1000" b="0">
                 <a:solidFill>
                   <a:srgbClr val="0D006A"/>
                 </a:solidFill>
@@ -14473,8 +14473,8 @@
         </p:nvSpPr>
         <p:spPr>
           <a:xfrm>
-            <a:off x="396000" y="1108800"/>
-            <a:ext cx="720000" cy="172800"/>
+            <a:off x="360000" y="860400"/>
+            <a:ext cx="666000" cy="129600"/>
           </a:xfrm>
           <a:prstGeom prst="rect">
             <a:avLst/>
@@ -14488,7 +14488,7 @@
           <a:lstStyle/>
           <a:p>
             <a:pPr>
-              <a:defRPr sz="1400" b="1">
+              <a:defRPr sz="900" b="1">
                 <a:solidFill>
                   <a:srgbClr val="3F0576"/>
                 </a:solidFill>
@@ -14509,8 +14509,8 @@
         </p:nvSpPr>
         <p:spPr>
           <a:xfrm>
-            <a:off x="1206000" y="1108800"/>
-            <a:ext cx="3024000" cy="172800"/>
+            <a:off x="1098000" y="860400"/>
+            <a:ext cx="3240000" cy="129600"/>
           </a:xfrm>
           <a:prstGeom prst="rect">
             <a:avLst/>
@@ -14524,7 +14524,7 @@
           <a:lstStyle/>
           <a:p>
             <a:pPr>
-              <a:defRPr sz="1500" b="0">
+              <a:defRPr sz="1000" b="0">
                 <a:solidFill>
                   <a:srgbClr val="0D006A"/>
                 </a:solidFill>
@@ -14545,8 +14545,8 @@
         </p:nvSpPr>
         <p:spPr>
           <a:xfrm>
-            <a:off x="396000" y="1339200"/>
-            <a:ext cx="720000" cy="172800"/>
+            <a:off x="360000" y="1047600"/>
+            <a:ext cx="666000" cy="129600"/>
           </a:xfrm>
           <a:prstGeom prst="rect">
             <a:avLst/>
@@ -14560,7 +14560,7 @@
           <a:lstStyle/>
           <a:p>
             <a:pPr>
-              <a:defRPr sz="1400" b="1">
+              <a:defRPr sz="900" b="1">
                 <a:solidFill>
                   <a:srgbClr val="3F0576"/>
                 </a:solidFill>
@@ -14581,8 +14581,8 @@
         </p:nvSpPr>
         <p:spPr>
           <a:xfrm>
-            <a:off x="1206000" y="1339200"/>
-            <a:ext cx="3024000" cy="172800"/>
+            <a:off x="1098000" y="1047600"/>
+            <a:ext cx="3240000" cy="129600"/>
           </a:xfrm>
           <a:prstGeom prst="rect">
             <a:avLst/>
@@ -14596,7 +14596,7 @@
           <a:lstStyle/>
           <a:p>
             <a:pPr>
-              <a:defRPr sz="1500" b="0">
+              <a:defRPr sz="1000" b="0">
                 <a:solidFill>
                   <a:srgbClr val="0D006A"/>
                 </a:solidFill>
@@ -14617,8 +14617,8 @@
         </p:nvSpPr>
         <p:spPr>
           <a:xfrm>
-            <a:off x="396000" y="1569600"/>
-            <a:ext cx="720000" cy="172800"/>
+            <a:off x="360000" y="1234800"/>
+            <a:ext cx="666000" cy="129600"/>
           </a:xfrm>
           <a:prstGeom prst="rect">
             <a:avLst/>
@@ -14632,7 +14632,7 @@
           <a:lstStyle/>
           <a:p>
             <a:pPr>
-              <a:defRPr sz="1400" b="1">
+              <a:defRPr sz="900" b="1">
                 <a:solidFill>
                   <a:srgbClr val="3F0576"/>
                 </a:solidFill>
@@ -14653,8 +14653,8 @@
         </p:nvSpPr>
         <p:spPr>
           <a:xfrm>
-            <a:off x="1206000" y="1569600"/>
-            <a:ext cx="3024000" cy="172800"/>
+            <a:off x="1098000" y="1234800"/>
+            <a:ext cx="3240000" cy="129600"/>
           </a:xfrm>
           <a:prstGeom prst="rect">
             <a:avLst/>
@@ -14668,7 +14668,7 @@
           <a:lstStyle/>
           <a:p>
             <a:pPr>
-              <a:defRPr sz="1500" b="0">
+              <a:defRPr sz="1000" b="0">
                 <a:solidFill>
                   <a:srgbClr val="0D006A"/>
                 </a:solidFill>
@@ -14689,7 +14689,7 @@
         </p:nvSpPr>
         <p:spPr>
           <a:xfrm>
-            <a:off x="0" y="2466000"/>
+            <a:off x="0" y="2538000"/>
             <a:ext cx="4799880" cy="18000"/>
           </a:xfrm>
           <a:prstGeom prst="rect">
@@ -14742,8 +14742,8 @@
         </p:blipFill>
         <p:spPr>
           <a:xfrm>
-            <a:off x="198000" y="2527200"/>
-            <a:ext cx="100543" cy="100800"/>
+            <a:off x="198000" y="2577600"/>
+            <a:ext cx="64635" cy="64800"/>
           </a:xfrm>
           <a:prstGeom prst="rect">
             <a:avLst/>
@@ -14758,8 +14758,8 @@
         </p:nvSpPr>
         <p:spPr>
           <a:xfrm>
-            <a:off x="3791880" y="2512800"/>
-            <a:ext cx="810000" cy="108000"/>
+            <a:off x="3791880" y="2566800"/>
+            <a:ext cx="810000" cy="79200"/>
           </a:xfrm>
           <a:prstGeom prst="rect">
             <a:avLst/>
@@ -14773,7 +14773,7 @@
           <a:lstStyle/>
           <a:p>
             <a:pPr algn="r">
-              <a:defRPr sz="800" b="0">
+              <a:defRPr sz="600" b="0">
                 <a:solidFill>
                   <a:srgbClr val="0D006A"/>
                 </a:solidFill>
@@ -14820,8 +14820,8 @@
         </p:nvSpPr>
         <p:spPr>
           <a:xfrm>
-            <a:off x="324000" y="522000"/>
-            <a:ext cx="4031999" cy="576000"/>
+            <a:off x="324000" y="486000"/>
+            <a:ext cx="4104000" cy="288000"/>
           </a:xfrm>
           <a:prstGeom prst="rect">
             <a:avLst/>
@@ -14835,7 +14835,7 @@
           <a:lstStyle/>
           <a:p>
             <a:pPr>
-              <a:defRPr sz="3400" b="1">
+              <a:defRPr sz="1800" b="1">
                 <a:solidFill>
                   <a:srgbClr val="0D006A"/>
                 </a:solidFill>
@@ -14856,8 +14856,8 @@
         </p:nvSpPr>
         <p:spPr>
           <a:xfrm>
-            <a:off x="360000" y="1206000"/>
-            <a:ext cx="3420000" cy="558000"/>
+            <a:off x="360000" y="917999"/>
+            <a:ext cx="3744000" cy="882000"/>
           </a:xfrm>
           <a:prstGeom prst="rect">
             <a:avLst/>
@@ -14872,9 +14872,9 @@
           <a:p>
             <a:pPr>
               <a:spcAft>
-                <a:spcPts val="700"/>
+                <a:spcPts val="300"/>
               </a:spcAft>
-              <a:defRPr sz="1800">
+              <a:defRPr sz="1100">
                 <a:solidFill>
                   <a:srgbClr val="F2F2F2"/>
                 </a:solidFill>
@@ -14888,9 +14888,9 @@
           <a:p>
             <a:pPr>
               <a:spcAft>
-                <a:spcPts val="700"/>
+                <a:spcPts val="300"/>
               </a:spcAft>
-              <a:defRPr sz="1800">
+              <a:defRPr sz="1100">
                 <a:solidFill>
                   <a:srgbClr val="F2F2F2"/>
                 </a:solidFill>
@@ -14904,9 +14904,9 @@
           <a:p>
             <a:pPr>
               <a:spcAft>
-                <a:spcPts val="700"/>
+                <a:spcPts val="300"/>
               </a:spcAft>
-              <a:defRPr sz="1800">
+              <a:defRPr sz="1100">
                 <a:solidFill>
                   <a:srgbClr val="F2F2F2"/>
                 </a:solidFill>
@@ -14927,8 +14927,8 @@
         </p:nvSpPr>
         <p:spPr>
           <a:xfrm>
-            <a:off x="324000" y="1998000"/>
-            <a:ext cx="1152000" cy="57600"/>
+            <a:off x="324000" y="1925999"/>
+            <a:ext cx="936000" cy="28800"/>
           </a:xfrm>
           <a:prstGeom prst="rect">
             <a:avLst/>
@@ -14972,7 +14972,7 @@
         </p:nvSpPr>
         <p:spPr>
           <a:xfrm>
-            <a:off x="0" y="2466000"/>
+            <a:off x="0" y="2538000"/>
             <a:ext cx="4799880" cy="18000"/>
           </a:xfrm>
           <a:prstGeom prst="rect">
@@ -15025,8 +15025,8 @@
         </p:blipFill>
         <p:spPr>
           <a:xfrm>
-            <a:off x="198000" y="2527200"/>
-            <a:ext cx="100543" cy="100800"/>
+            <a:off x="198000" y="2577600"/>
+            <a:ext cx="64635" cy="64800"/>
           </a:xfrm>
           <a:prstGeom prst="rect">
             <a:avLst/>
@@ -15041,8 +15041,8 @@
         </p:nvSpPr>
         <p:spPr>
           <a:xfrm>
-            <a:off x="3791880" y="2512800"/>
-            <a:ext cx="810000" cy="108000"/>
+            <a:off x="3791880" y="2566800"/>
+            <a:ext cx="810000" cy="79200"/>
           </a:xfrm>
           <a:prstGeom prst="rect">
             <a:avLst/>
@@ -15056,7 +15056,7 @@
           <a:lstStyle/>
           <a:p>
             <a:pPr algn="r">
-              <a:defRPr sz="800" b="0">
+              <a:defRPr sz="600" b="0">
                 <a:solidFill>
                   <a:srgbClr val="0D006A"/>
                 </a:solidFill>
@@ -15103,8 +15103,8 @@
         </p:nvSpPr>
         <p:spPr>
           <a:xfrm>
-            <a:off x="306000" y="198000"/>
-            <a:ext cx="4068000" cy="306000"/>
+            <a:off x="306000" y="151200"/>
+            <a:ext cx="4140000" cy="187200"/>
           </a:xfrm>
           <a:prstGeom prst="rect">
             <a:avLst/>
@@ -15118,7 +15118,7 @@
           <a:lstStyle/>
           <a:p>
             <a:pPr>
-              <a:defRPr sz="3300" b="1">
+              <a:defRPr sz="1800" b="1">
                 <a:solidFill>
                   <a:srgbClr val="0D006A"/>
                 </a:solidFill>
@@ -15139,8 +15139,8 @@
         </p:nvSpPr>
         <p:spPr>
           <a:xfrm>
-            <a:off x="306000" y="514800"/>
-            <a:ext cx="450000" cy="28800"/>
+            <a:off x="306000" y="367200"/>
+            <a:ext cx="378000" cy="18000"/>
           </a:xfrm>
           <a:prstGeom prst="rect">
             <a:avLst/>
@@ -15184,8 +15184,8 @@
         </p:nvSpPr>
         <p:spPr>
           <a:xfrm>
-            <a:off x="378000" y="666000"/>
-            <a:ext cx="3924000" cy="1530000"/>
+            <a:off x="378000" y="486000"/>
+            <a:ext cx="3996000" cy="1745999"/>
           </a:xfrm>
           <a:prstGeom prst="rect">
             <a:avLst/>
@@ -15200,9 +15200,9 @@
           <a:p>
             <a:pPr>
               <a:spcAft>
-                <a:spcPts val="700"/>
+                <a:spcPts val="300"/>
               </a:spcAft>
-              <a:defRPr sz="1700">
+              <a:defRPr sz="1100">
                 <a:solidFill>
                   <a:srgbClr val="0D006A"/>
                 </a:solidFill>
@@ -15216,9 +15216,9 @@
           <a:p>
             <a:pPr>
               <a:spcAft>
-                <a:spcPts val="700"/>
+                <a:spcPts val="300"/>
               </a:spcAft>
-              <a:defRPr sz="1700">
+              <a:defRPr sz="1100">
                 <a:solidFill>
                   <a:srgbClr val="0D006A"/>
                 </a:solidFill>
@@ -15232,9 +15232,9 @@
           <a:p>
             <a:pPr>
               <a:spcAft>
-                <a:spcPts val="700"/>
+                <a:spcPts val="300"/>
               </a:spcAft>
-              <a:defRPr sz="1700">
+              <a:defRPr sz="1100">
                 <a:solidFill>
                   <a:srgbClr val="0D006A"/>
                 </a:solidFill>
@@ -15248,9 +15248,9 @@
           <a:p>
             <a:pPr>
               <a:spcAft>
-                <a:spcPts val="700"/>
+                <a:spcPts val="300"/>
               </a:spcAft>
-              <a:defRPr sz="1700">
+              <a:defRPr sz="1100">
                 <a:solidFill>
                   <a:srgbClr val="0D006A"/>
                 </a:solidFill>
@@ -15264,9 +15264,9 @@
           <a:p>
             <a:pPr>
               <a:spcAft>
-                <a:spcPts val="700"/>
+                <a:spcPts val="300"/>
               </a:spcAft>
-              <a:defRPr sz="1700">
+              <a:defRPr sz="1100">
                 <a:solidFill>
                   <a:srgbClr val="0D006A"/>
                 </a:solidFill>
@@ -15287,7 +15287,7 @@
         </p:nvSpPr>
         <p:spPr>
           <a:xfrm>
-            <a:off x="0" y="2466000"/>
+            <a:off x="0" y="2538000"/>
             <a:ext cx="4799880" cy="18000"/>
           </a:xfrm>
           <a:prstGeom prst="rect">
@@ -15340,8 +15340,8 @@
         </p:blipFill>
         <p:spPr>
           <a:xfrm>
-            <a:off x="198000" y="2527200"/>
-            <a:ext cx="100543" cy="100800"/>
+            <a:off x="198000" y="2577600"/>
+            <a:ext cx="64635" cy="64800"/>
           </a:xfrm>
           <a:prstGeom prst="rect">
             <a:avLst/>
@@ -15356,8 +15356,8 @@
         </p:nvSpPr>
         <p:spPr>
           <a:xfrm>
-            <a:off x="3791880" y="2512800"/>
-            <a:ext cx="810000" cy="108000"/>
+            <a:off x="3791880" y="2566800"/>
+            <a:ext cx="810000" cy="79200"/>
           </a:xfrm>
           <a:prstGeom prst="rect">
             <a:avLst/>
@@ -15371,7 +15371,7 @@
           <a:lstStyle/>
           <a:p>
             <a:pPr algn="r">
-              <a:defRPr sz="800" b="0">
+              <a:defRPr sz="600" b="0">
                 <a:solidFill>
                   <a:srgbClr val="0D006A"/>
                 </a:solidFill>
@@ -15418,8 +15418,8 @@
         </p:nvSpPr>
         <p:spPr>
           <a:xfrm>
-            <a:off x="306000" y="198000"/>
-            <a:ext cx="4068000" cy="306000"/>
+            <a:off x="306000" y="151200"/>
+            <a:ext cx="4140000" cy="187200"/>
           </a:xfrm>
           <a:prstGeom prst="rect">
             <a:avLst/>
@@ -15433,7 +15433,7 @@
           <a:lstStyle/>
           <a:p>
             <a:pPr>
-              <a:defRPr sz="3300" b="1">
+              <a:defRPr sz="1800" b="1">
                 <a:solidFill>
                   <a:srgbClr val="0D006A"/>
                 </a:solidFill>
@@ -15454,8 +15454,8 @@
         </p:nvSpPr>
         <p:spPr>
           <a:xfrm>
-            <a:off x="306000" y="514800"/>
-            <a:ext cx="450000" cy="28800"/>
+            <a:off x="306000" y="367200"/>
+            <a:ext cx="378000" cy="18000"/>
           </a:xfrm>
           <a:prstGeom prst="rect">
             <a:avLst/>
@@ -15499,8 +15499,8 @@
         </p:nvSpPr>
         <p:spPr>
           <a:xfrm>
-            <a:off x="378000" y="666000"/>
-            <a:ext cx="3924000" cy="1530000"/>
+            <a:off x="378000" y="486000"/>
+            <a:ext cx="3996000" cy="1745999"/>
           </a:xfrm>
           <a:prstGeom prst="rect">
             <a:avLst/>
@@ -15515,9 +15515,9 @@
           <a:p>
             <a:pPr>
               <a:spcAft>
-                <a:spcPts val="700"/>
+                <a:spcPts val="300"/>
               </a:spcAft>
-              <a:defRPr sz="1700">
+              <a:defRPr sz="1100">
                 <a:solidFill>
                   <a:srgbClr val="0D006A"/>
                 </a:solidFill>
@@ -15531,9 +15531,9 @@
           <a:p>
             <a:pPr>
               <a:spcAft>
-                <a:spcPts val="700"/>
+                <a:spcPts val="300"/>
               </a:spcAft>
-              <a:defRPr sz="1700">
+              <a:defRPr sz="1100">
                 <a:solidFill>
                   <a:srgbClr val="0D006A"/>
                 </a:solidFill>
@@ -15547,9 +15547,9 @@
           <a:p>
             <a:pPr>
               <a:spcAft>
-                <a:spcPts val="700"/>
+                <a:spcPts val="300"/>
               </a:spcAft>
-              <a:defRPr sz="1700">
+              <a:defRPr sz="1100">
                 <a:solidFill>
                   <a:srgbClr val="0D006A"/>
                 </a:solidFill>
@@ -15570,7 +15570,7 @@
         </p:nvSpPr>
         <p:spPr>
           <a:xfrm>
-            <a:off x="0" y="2466000"/>
+            <a:off x="0" y="2538000"/>
             <a:ext cx="4799880" cy="18000"/>
           </a:xfrm>
           <a:prstGeom prst="rect">
@@ -15623,8 +15623,8 @@
         </p:blipFill>
         <p:spPr>
           <a:xfrm>
-            <a:off x="198000" y="2527200"/>
-            <a:ext cx="100543" cy="100800"/>
+            <a:off x="198000" y="2577600"/>
+            <a:ext cx="64635" cy="64800"/>
           </a:xfrm>
           <a:prstGeom prst="rect">
             <a:avLst/>
@@ -15639,8 +15639,8 @@
         </p:nvSpPr>
         <p:spPr>
           <a:xfrm>
-            <a:off x="3791880" y="2512800"/>
-            <a:ext cx="810000" cy="108000"/>
+            <a:off x="3791880" y="2566800"/>
+            <a:ext cx="810000" cy="79200"/>
           </a:xfrm>
           <a:prstGeom prst="rect">
             <a:avLst/>
@@ -15654,7 +15654,7 @@
           <a:lstStyle/>
           <a:p>
             <a:pPr algn="r">
-              <a:defRPr sz="800" b="0">
+              <a:defRPr sz="600" b="0">
                 <a:solidFill>
                   <a:srgbClr val="0D006A"/>
                 </a:solidFill>
@@ -15701,8 +15701,8 @@
         </p:nvSpPr>
         <p:spPr>
           <a:xfrm>
-            <a:off x="306000" y="198000"/>
-            <a:ext cx="4068000" cy="306000"/>
+            <a:off x="306000" y="151200"/>
+            <a:ext cx="4140000" cy="187200"/>
           </a:xfrm>
           <a:prstGeom prst="rect">
             <a:avLst/>
@@ -15716,7 +15716,7 @@
           <a:lstStyle/>
           <a:p>
             <a:pPr>
-              <a:defRPr sz="3300" b="1">
+              <a:defRPr sz="1800" b="1">
                 <a:solidFill>
                   <a:srgbClr val="0D006A"/>
                 </a:solidFill>
@@ -15737,8 +15737,8 @@
         </p:nvSpPr>
         <p:spPr>
           <a:xfrm>
-            <a:off x="306000" y="514800"/>
-            <a:ext cx="450000" cy="28800"/>
+            <a:off x="306000" y="367200"/>
+            <a:ext cx="378000" cy="18000"/>
           </a:xfrm>
           <a:prstGeom prst="rect">
             <a:avLst/>
@@ -15782,8 +15782,8 @@
         </p:nvSpPr>
         <p:spPr>
           <a:xfrm>
-            <a:off x="396000" y="737999"/>
-            <a:ext cx="1872000" cy="1530000"/>
+            <a:off x="360000" y="522000"/>
+            <a:ext cx="1962000" cy="1800000"/>
           </a:xfrm>
           <a:prstGeom prst="rect">
             <a:avLst/>
@@ -15798,9 +15798,9 @@
           <a:p>
             <a:pPr>
               <a:spcAft>
-                <a:spcPts val="700"/>
+                <a:spcPts val="300"/>
               </a:spcAft>
-              <a:defRPr sz="1800">
+              <a:defRPr sz="1100">
                 <a:solidFill>
                   <a:srgbClr val="0D006A"/>
                 </a:solidFill>
@@ -15814,9 +15814,9 @@
           <a:p>
             <a:pPr>
               <a:spcAft>
-                <a:spcPts val="700"/>
+                <a:spcPts val="300"/>
               </a:spcAft>
-              <a:defRPr sz="1800">
+              <a:defRPr sz="1100">
                 <a:solidFill>
                   <a:srgbClr val="0D006A"/>
                 </a:solidFill>
@@ -15830,9 +15830,9 @@
           <a:p>
             <a:pPr>
               <a:spcAft>
-                <a:spcPts val="700"/>
+                <a:spcPts val="300"/>
               </a:spcAft>
-              <a:defRPr sz="1800">
+              <a:defRPr sz="1100">
                 <a:solidFill>
                   <a:srgbClr val="0D006A"/>
                 </a:solidFill>
@@ -15853,8 +15853,8 @@
         </p:nvSpPr>
         <p:spPr>
           <a:xfrm>
-            <a:off x="2520000" y="737999"/>
-            <a:ext cx="1800000" cy="1530000"/>
+            <a:off x="2484000" y="522000"/>
+            <a:ext cx="1962000" cy="1800000"/>
           </a:xfrm>
           <a:prstGeom prst="rect">
             <a:avLst/>
@@ -15869,9 +15869,9 @@
           <a:p>
             <a:pPr>
               <a:spcAft>
-                <a:spcPts val="700"/>
+                <a:spcPts val="300"/>
               </a:spcAft>
-              <a:defRPr sz="1800">
+              <a:defRPr sz="1100">
                 <a:solidFill>
                   <a:srgbClr val="0D006A"/>
                 </a:solidFill>
@@ -15885,9 +15885,9 @@
           <a:p>
             <a:pPr>
               <a:spcAft>
-                <a:spcPts val="700"/>
+                <a:spcPts val="300"/>
               </a:spcAft>
-              <a:defRPr sz="1800">
+              <a:defRPr sz="1100">
                 <a:solidFill>
                   <a:srgbClr val="0D006A"/>
                 </a:solidFill>
@@ -15901,9 +15901,9 @@
           <a:p>
             <a:pPr>
               <a:spcAft>
-                <a:spcPts val="700"/>
+                <a:spcPts val="300"/>
               </a:spcAft>
-              <a:defRPr sz="1800">
+              <a:defRPr sz="1100">
                 <a:solidFill>
                   <a:srgbClr val="0D006A"/>
                 </a:solidFill>
@@ -15924,7 +15924,7 @@
         </p:nvSpPr>
         <p:spPr>
           <a:xfrm>
-            <a:off x="0" y="2466000"/>
+            <a:off x="0" y="2538000"/>
             <a:ext cx="4799880" cy="18000"/>
           </a:xfrm>
           <a:prstGeom prst="rect">
@@ -15977,8 +15977,8 @@
         </p:blipFill>
         <p:spPr>
           <a:xfrm>
-            <a:off x="198000" y="2527200"/>
-            <a:ext cx="100543" cy="100800"/>
+            <a:off x="198000" y="2577600"/>
+            <a:ext cx="64635" cy="64800"/>
           </a:xfrm>
           <a:prstGeom prst="rect">
             <a:avLst/>
@@ -15993,8 +15993,8 @@
         </p:nvSpPr>
         <p:spPr>
           <a:xfrm>
-            <a:off x="3791880" y="2512800"/>
-            <a:ext cx="810000" cy="108000"/>
+            <a:off x="3791880" y="2566800"/>
+            <a:ext cx="810000" cy="79200"/>
           </a:xfrm>
           <a:prstGeom prst="rect">
             <a:avLst/>
@@ -16008,7 +16008,7 @@
           <a:lstStyle/>
           <a:p>
             <a:pPr algn="r">
-              <a:defRPr sz="800" b="0">
+              <a:defRPr sz="600" b="0">
                 <a:solidFill>
                   <a:srgbClr val="0D006A"/>
                 </a:solidFill>
@@ -16055,8 +16055,8 @@
         </p:nvSpPr>
         <p:spPr>
           <a:xfrm>
-            <a:off x="306000" y="198000"/>
-            <a:ext cx="4068000" cy="306000"/>
+            <a:off x="306000" y="151200"/>
+            <a:ext cx="4140000" cy="187200"/>
           </a:xfrm>
           <a:prstGeom prst="rect">
             <a:avLst/>
@@ -16070,7 +16070,7 @@
           <a:lstStyle/>
           <a:p>
             <a:pPr>
-              <a:defRPr sz="3300" b="1">
+              <a:defRPr sz="1800" b="1">
                 <a:solidFill>
                   <a:srgbClr val="0D006A"/>
                 </a:solidFill>
@@ -16091,8 +16091,8 @@
         </p:nvSpPr>
         <p:spPr>
           <a:xfrm>
-            <a:off x="306000" y="514800"/>
-            <a:ext cx="450000" cy="28800"/>
+            <a:off x="306000" y="367200"/>
+            <a:ext cx="378000" cy="18000"/>
           </a:xfrm>
           <a:prstGeom prst="rect">
             <a:avLst/>
@@ -16136,8 +16136,8 @@
         </p:nvSpPr>
         <p:spPr>
           <a:xfrm>
-            <a:off x="378000" y="666000"/>
-            <a:ext cx="3924000" cy="1530000"/>
+            <a:off x="378000" y="486000"/>
+            <a:ext cx="3996000" cy="1745999"/>
           </a:xfrm>
           <a:prstGeom prst="rect">
             <a:avLst/>
@@ -16152,9 +16152,9 @@
           <a:p>
             <a:pPr>
               <a:spcAft>
-                <a:spcPts val="700"/>
+                <a:spcPts val="300"/>
               </a:spcAft>
-              <a:defRPr sz="1700">
+              <a:defRPr sz="1100">
                 <a:solidFill>
                   <a:srgbClr val="0D006A"/>
                 </a:solidFill>
@@ -16168,9 +16168,9 @@
           <a:p>
             <a:pPr>
               <a:spcAft>
-                <a:spcPts val="700"/>
+                <a:spcPts val="300"/>
               </a:spcAft>
-              <a:defRPr sz="1700">
+              <a:defRPr sz="1100">
                 <a:solidFill>
                   <a:srgbClr val="0D006A"/>
                 </a:solidFill>
@@ -16184,9 +16184,9 @@
           <a:p>
             <a:pPr>
               <a:spcAft>
-                <a:spcPts val="700"/>
+                <a:spcPts val="300"/>
               </a:spcAft>
-              <a:defRPr sz="1700">
+              <a:defRPr sz="1100">
                 <a:solidFill>
                   <a:srgbClr val="0D006A"/>
                 </a:solidFill>
@@ -16200,9 +16200,9 @@
           <a:p>
             <a:pPr>
               <a:spcAft>
-                <a:spcPts val="700"/>
+                <a:spcPts val="300"/>
               </a:spcAft>
-              <a:defRPr sz="1700">
+              <a:defRPr sz="1100">
                 <a:solidFill>
                   <a:srgbClr val="0D006A"/>
                 </a:solidFill>
@@ -16216,9 +16216,9 @@
           <a:p>
             <a:pPr>
               <a:spcAft>
-                <a:spcPts val="700"/>
+                <a:spcPts val="300"/>
               </a:spcAft>
-              <a:defRPr sz="1700">
+              <a:defRPr sz="1100">
                 <a:solidFill>
                   <a:srgbClr val="0D006A"/>
                 </a:solidFill>
@@ -16239,8 +16239,8 @@
         </p:nvSpPr>
         <p:spPr>
           <a:xfrm>
-            <a:off x="306000" y="2232000"/>
-            <a:ext cx="4194000" cy="208800"/>
+            <a:off x="306000" y="2278800"/>
+            <a:ext cx="4194000" cy="136800"/>
           </a:xfrm>
           <a:prstGeom prst="rect">
             <a:avLst/>
@@ -16284,8 +16284,8 @@
         </p:nvSpPr>
         <p:spPr>
           <a:xfrm>
-            <a:off x="378000" y="2264400"/>
-            <a:ext cx="4031999" cy="115200"/>
+            <a:off x="360000" y="2296800"/>
+            <a:ext cx="4086000" cy="79200"/>
           </a:xfrm>
           <a:prstGeom prst="rect">
             <a:avLst/>
@@ -16299,7 +16299,7 @@
           <a:lstStyle/>
           <a:p>
             <a:pPr>
-              <a:defRPr sz="1100" b="1">
+              <a:defRPr sz="800" b="1">
                 <a:solidFill>
                   <a:srgbClr val="F2F2F2"/>
                 </a:solidFill>
@@ -16320,7 +16320,7 @@
         </p:nvSpPr>
         <p:spPr>
           <a:xfrm>
-            <a:off x="0" y="2466000"/>
+            <a:off x="0" y="2538000"/>
             <a:ext cx="4799880" cy="18000"/>
           </a:xfrm>
           <a:prstGeom prst="rect">
@@ -16373,8 +16373,8 @@
         </p:blipFill>
         <p:spPr>
           <a:xfrm>
-            <a:off x="198000" y="2527200"/>
-            <a:ext cx="100543" cy="100800"/>
+            <a:off x="198000" y="2577600"/>
+            <a:ext cx="64635" cy="64800"/>
           </a:xfrm>
           <a:prstGeom prst="rect">
             <a:avLst/>
@@ -16389,8 +16389,8 @@
         </p:nvSpPr>
         <p:spPr>
           <a:xfrm>
-            <a:off x="3791880" y="2512800"/>
-            <a:ext cx="810000" cy="108000"/>
+            <a:off x="3791880" y="2566800"/>
+            <a:ext cx="810000" cy="79200"/>
           </a:xfrm>
           <a:prstGeom prst="rect">
             <a:avLst/>
@@ -16404,7 +16404,7 @@
           <a:lstStyle/>
           <a:p>
             <a:pPr algn="r">
-              <a:defRPr sz="800" b="0">
+              <a:defRPr sz="600" b="0">
                 <a:solidFill>
                   <a:srgbClr val="0D006A"/>
                 </a:solidFill>
@@ -16451,8 +16451,8 @@
         </p:nvSpPr>
         <p:spPr>
           <a:xfrm>
-            <a:off x="306000" y="198000"/>
-            <a:ext cx="4068000" cy="306000"/>
+            <a:off x="306000" y="151200"/>
+            <a:ext cx="4140000" cy="187200"/>
           </a:xfrm>
           <a:prstGeom prst="rect">
             <a:avLst/>
@@ -16466,7 +16466,7 @@
           <a:lstStyle/>
           <a:p>
             <a:pPr>
-              <a:defRPr sz="3300" b="1">
+              <a:defRPr sz="1800" b="1">
                 <a:solidFill>
                   <a:srgbClr val="0D006A"/>
                 </a:solidFill>
@@ -16487,8 +16487,8 @@
         </p:nvSpPr>
         <p:spPr>
           <a:xfrm>
-            <a:off x="306000" y="514800"/>
-            <a:ext cx="450000" cy="28800"/>
+            <a:off x="306000" y="367200"/>
+            <a:ext cx="378000" cy="18000"/>
           </a:xfrm>
           <a:prstGeom prst="rect">
             <a:avLst/>
@@ -16532,8 +16532,8 @@
         </p:nvSpPr>
         <p:spPr>
           <a:xfrm>
-            <a:off x="378000" y="666000"/>
-            <a:ext cx="3924000" cy="1530000"/>
+            <a:off x="378000" y="486000"/>
+            <a:ext cx="3996000" cy="1745999"/>
           </a:xfrm>
           <a:prstGeom prst="rect">
             <a:avLst/>
@@ -16548,9 +16548,9 @@
           <a:p>
             <a:pPr>
               <a:spcAft>
-                <a:spcPts val="700"/>
+                <a:spcPts val="300"/>
               </a:spcAft>
-              <a:defRPr sz="1700">
+              <a:defRPr sz="1100">
                 <a:solidFill>
                   <a:srgbClr val="0D006A"/>
                 </a:solidFill>
@@ -16564,9 +16564,9 @@
           <a:p>
             <a:pPr>
               <a:spcAft>
-                <a:spcPts val="700"/>
+                <a:spcPts val="300"/>
               </a:spcAft>
-              <a:defRPr sz="1700">
+              <a:defRPr sz="1100">
                 <a:solidFill>
                   <a:srgbClr val="0D006A"/>
                 </a:solidFill>
@@ -16580,9 +16580,9 @@
           <a:p>
             <a:pPr>
               <a:spcAft>
-                <a:spcPts val="700"/>
+                <a:spcPts val="300"/>
               </a:spcAft>
-              <a:defRPr sz="1700">
+              <a:defRPr sz="1100">
                 <a:solidFill>
                   <a:srgbClr val="0D006A"/>
                 </a:solidFill>
@@ -16596,9 +16596,9 @@
           <a:p>
             <a:pPr>
               <a:spcAft>
-                <a:spcPts val="700"/>
+                <a:spcPts val="300"/>
               </a:spcAft>
-              <a:defRPr sz="1700">
+              <a:defRPr sz="1100">
                 <a:solidFill>
                   <a:srgbClr val="0D006A"/>
                 </a:solidFill>
@@ -16612,9 +16612,9 @@
           <a:p>
             <a:pPr>
               <a:spcAft>
-                <a:spcPts val="700"/>
+                <a:spcPts val="300"/>
               </a:spcAft>
-              <a:defRPr sz="1700">
+              <a:defRPr sz="1100">
                 <a:solidFill>
                   <a:srgbClr val="0D006A"/>
                 </a:solidFill>
@@ -16635,8 +16635,8 @@
         </p:nvSpPr>
         <p:spPr>
           <a:xfrm>
-            <a:off x="306000" y="2232000"/>
-            <a:ext cx="4194000" cy="208800"/>
+            <a:off x="306000" y="2278800"/>
+            <a:ext cx="4194000" cy="136800"/>
           </a:xfrm>
           <a:prstGeom prst="rect">
             <a:avLst/>
@@ -16680,8 +16680,8 @@
         </p:nvSpPr>
         <p:spPr>
           <a:xfrm>
-            <a:off x="378000" y="2264400"/>
-            <a:ext cx="4031999" cy="115200"/>
+            <a:off x="360000" y="2296800"/>
+            <a:ext cx="4086000" cy="79200"/>
           </a:xfrm>
           <a:prstGeom prst="rect">
             <a:avLst/>
@@ -16695,7 +16695,7 @@
           <a:lstStyle/>
           <a:p>
             <a:pPr>
-              <a:defRPr sz="1100" b="1">
+              <a:defRPr sz="800" b="1">
                 <a:solidFill>
                   <a:srgbClr val="F2F2F2"/>
                 </a:solidFill>
@@ -16716,7 +16716,7 @@
         </p:nvSpPr>
         <p:spPr>
           <a:xfrm>
-            <a:off x="0" y="2466000"/>
+            <a:off x="0" y="2538000"/>
             <a:ext cx="4799880" cy="18000"/>
           </a:xfrm>
           <a:prstGeom prst="rect">
@@ -16769,8 +16769,8 @@
         </p:blipFill>
         <p:spPr>
           <a:xfrm>
-            <a:off x="198000" y="2527200"/>
-            <a:ext cx="100543" cy="100800"/>
+            <a:off x="198000" y="2577600"/>
+            <a:ext cx="64635" cy="64800"/>
           </a:xfrm>
           <a:prstGeom prst="rect">
             <a:avLst/>
@@ -16785,8 +16785,8 @@
         </p:nvSpPr>
         <p:spPr>
           <a:xfrm>
-            <a:off x="3791880" y="2512800"/>
-            <a:ext cx="810000" cy="108000"/>
+            <a:off x="3791880" y="2566800"/>
+            <a:ext cx="810000" cy="79200"/>
           </a:xfrm>
           <a:prstGeom prst="rect">
             <a:avLst/>
@@ -16800,7 +16800,7 @@
           <a:lstStyle/>
           <a:p>
             <a:pPr algn="r">
-              <a:defRPr sz="800" b="0">
+              <a:defRPr sz="600" b="0">
                 <a:solidFill>
                   <a:srgbClr val="0D006A"/>
                 </a:solidFill>
